--- a/S1-CL1-Cloud-Design-Build/delivery/topic_08/Topic_08a_Slides.pptx
+++ b/S1-CL1-Cloud-Design-Build/delivery/topic_08/Topic_08a_Slides.pptx
@@ -4962,7 +4962,7 @@
           <a:noFill/>
         </p:spPr>
         <p:txBody>
-          <a:bodyPr wrap="square" anchor="t" lIns="0" rIns="0" tIns="0" bIns="0">
+          <a:bodyPr wrap="square" anchor="ctr" lIns="0" rIns="0" tIns="0" bIns="0">
             <a:spAutoFit/>
           </a:bodyPr>
           <a:lstStyle/>
@@ -4979,7 +4979,7 @@
               </a:spcAft>
             </a:pPr>
             <a:r>
-              <a:rPr sz="1800" b="1" i="0">
+              <a:rPr sz="2400" b="1" i="0">
                 <a:solidFill>
                   <a:srgbClr val="EDAB0C"/>
                 </a:solidFill>
@@ -4988,7 +4988,7 @@
               <a:t>■  </a:t>
             </a:r>
             <a:r>
-              <a:rPr sz="1800" b="0" i="0">
+              <a:rPr sz="2400" b="0" i="0">
                 <a:solidFill>
                   <a:srgbClr val="2A2929"/>
                 </a:solidFill>
@@ -5010,7 +5010,7 @@
               </a:spcAft>
             </a:pPr>
             <a:r>
-              <a:rPr sz="1800" b="1" i="0">
+              <a:rPr sz="2400" b="1" i="0">
                 <a:solidFill>
                   <a:srgbClr val="EDAB0C"/>
                 </a:solidFill>
@@ -5019,7 +5019,7 @@
               <a:t>■  </a:t>
             </a:r>
             <a:r>
-              <a:rPr sz="1800" b="0" i="0">
+              <a:rPr sz="2400" b="0" i="0">
                 <a:solidFill>
                   <a:srgbClr val="2A2929"/>
                 </a:solidFill>
@@ -5041,7 +5041,7 @@
               </a:spcAft>
             </a:pPr>
             <a:r>
-              <a:rPr sz="1800" b="1" i="0">
+              <a:rPr sz="2400" b="1" i="0">
                 <a:solidFill>
                   <a:srgbClr val="27B5CE"/>
                 </a:solidFill>
@@ -5050,7 +5050,7 @@
               <a:t>■  </a:t>
             </a:r>
             <a:r>
-              <a:rPr sz="1800" b="1" i="0">
+              <a:rPr sz="2400" b="1" i="0">
                 <a:solidFill>
                   <a:srgbClr val="27B5CE"/>
                 </a:solidFill>
@@ -5072,7 +5072,7 @@
               </a:spcAft>
             </a:pPr>
             <a:r>
-              <a:rPr sz="1800" b="1" i="0">
+              <a:rPr sz="2400" b="1" i="0">
                 <a:solidFill>
                   <a:srgbClr val="EDAB0C"/>
                 </a:solidFill>
@@ -5081,7 +5081,7 @@
               <a:t>■  </a:t>
             </a:r>
             <a:r>
-              <a:rPr sz="1800" b="0" i="0">
+              <a:rPr sz="2400" b="0" i="0">
                 <a:solidFill>
                   <a:srgbClr val="2A2929"/>
                 </a:solidFill>
@@ -6146,7 +6146,7 @@
           <a:noFill/>
         </p:spPr>
         <p:txBody>
-          <a:bodyPr wrap="square" anchor="t" lIns="0" rIns="0" tIns="0" bIns="0">
+          <a:bodyPr wrap="square" anchor="ctr" lIns="0" rIns="0" tIns="0" bIns="0">
             <a:spAutoFit/>
           </a:bodyPr>
           <a:lstStyle/>
@@ -6163,7 +6163,7 @@
               </a:spcAft>
             </a:pPr>
             <a:r>
-              <a:rPr sz="1800" b="1" i="0">
+              <a:rPr sz="2400" b="1" i="0">
                 <a:solidFill>
                   <a:srgbClr val="EDAB0C"/>
                 </a:solidFill>
@@ -6172,7 +6172,7 @@
               <a:t>■  </a:t>
             </a:r>
             <a:r>
-              <a:rPr sz="1800" b="0" i="0">
+              <a:rPr sz="2400" b="0" i="0">
                 <a:solidFill>
                   <a:srgbClr val="2A2929"/>
                 </a:solidFill>
@@ -6194,7 +6194,7 @@
               </a:spcAft>
             </a:pPr>
             <a:r>
-              <a:rPr sz="1800" b="1" i="0">
+              <a:rPr sz="2400" b="1" i="0">
                 <a:solidFill>
                   <a:srgbClr val="EDAB0C"/>
                 </a:solidFill>
@@ -6203,7 +6203,7 @@
               <a:t>■  </a:t>
             </a:r>
             <a:r>
-              <a:rPr sz="1800" b="0" i="0">
+              <a:rPr sz="2400" b="0" i="0">
                 <a:solidFill>
                   <a:srgbClr val="2A2929"/>
                 </a:solidFill>
@@ -6225,7 +6225,7 @@
               </a:spcAft>
             </a:pPr>
             <a:r>
-              <a:rPr sz="1800" b="1" i="0">
+              <a:rPr sz="2400" b="1" i="0">
                 <a:solidFill>
                   <a:srgbClr val="EDAB0C"/>
                 </a:solidFill>
@@ -6234,7 +6234,7 @@
               <a:t>■  </a:t>
             </a:r>
             <a:r>
-              <a:rPr sz="1800" b="0" i="0">
+              <a:rPr sz="2400" b="0" i="0">
                 <a:solidFill>
                   <a:srgbClr val="2A2929"/>
                 </a:solidFill>
@@ -6256,7 +6256,7 @@
               </a:spcAft>
             </a:pPr>
             <a:r>
-              <a:rPr sz="1800" b="1" i="0">
+              <a:rPr sz="2400" b="1" i="0">
                 <a:solidFill>
                   <a:srgbClr val="27B5CE"/>
                 </a:solidFill>
@@ -6265,7 +6265,7 @@
               <a:t>■  </a:t>
             </a:r>
             <a:r>
-              <a:rPr sz="1800" b="1" i="0">
+              <a:rPr sz="2400" b="1" i="0">
                 <a:solidFill>
                   <a:srgbClr val="27B5CE"/>
                 </a:solidFill>
@@ -8305,7 +8305,7 @@
           <a:noFill/>
         </p:spPr>
         <p:txBody>
-          <a:bodyPr wrap="square" anchor="t" lIns="0" rIns="0" tIns="0" bIns="0">
+          <a:bodyPr wrap="square" anchor="ctr" lIns="0" rIns="0" tIns="0" bIns="0">
             <a:spAutoFit/>
           </a:bodyPr>
           <a:lstStyle/>
@@ -8322,7 +8322,7 @@
               </a:spcAft>
             </a:pPr>
             <a:r>
-              <a:rPr sz="1800" b="1" i="0">
+              <a:rPr sz="2400" b="1" i="0">
                 <a:solidFill>
                   <a:srgbClr val="EDAB0C"/>
                 </a:solidFill>
@@ -8331,7 +8331,7 @@
               <a:t>■  </a:t>
             </a:r>
             <a:r>
-              <a:rPr sz="1800" b="0" i="0">
+              <a:rPr sz="2400" b="0" i="0">
                 <a:solidFill>
                   <a:srgbClr val="2A2929"/>
                 </a:solidFill>
@@ -8353,7 +8353,7 @@
               </a:spcAft>
             </a:pPr>
             <a:r>
-              <a:rPr sz="1800" b="1" i="0">
+              <a:rPr sz="2400" b="1" i="0">
                 <a:solidFill>
                   <a:srgbClr val="92268F"/>
                 </a:solidFill>
@@ -8362,7 +8362,7 @@
               <a:t>■  </a:t>
             </a:r>
             <a:r>
-              <a:rPr sz="1800" b="1" i="0">
+              <a:rPr sz="2400" b="1" i="0">
                 <a:solidFill>
                   <a:srgbClr val="92268F"/>
                 </a:solidFill>
@@ -8384,7 +8384,7 @@
               </a:spcAft>
             </a:pPr>
             <a:r>
-              <a:rPr sz="1800" b="1" i="0">
+              <a:rPr sz="2400" b="1" i="0">
                 <a:solidFill>
                   <a:srgbClr val="EDAB0C"/>
                 </a:solidFill>
@@ -8393,7 +8393,7 @@
               <a:t>■  </a:t>
             </a:r>
             <a:r>
-              <a:rPr sz="1800" b="0" i="0">
+              <a:rPr sz="2400" b="0" i="0">
                 <a:solidFill>
                   <a:srgbClr val="2A2929"/>
                 </a:solidFill>
@@ -8415,7 +8415,7 @@
               </a:spcAft>
             </a:pPr>
             <a:r>
-              <a:rPr sz="1800" b="1" i="0">
+              <a:rPr sz="2400" b="1" i="0">
                 <a:solidFill>
                   <a:srgbClr val="EDAB0C"/>
                 </a:solidFill>
@@ -8424,7 +8424,7 @@
               <a:t>■  </a:t>
             </a:r>
             <a:r>
-              <a:rPr sz="1800" b="0" i="0">
+              <a:rPr sz="2400" b="0" i="0">
                 <a:solidFill>
                   <a:srgbClr val="2A2929"/>
                 </a:solidFill>
@@ -10015,7 +10015,7 @@
           <a:noFill/>
         </p:spPr>
         <p:txBody>
-          <a:bodyPr wrap="square" anchor="t" lIns="0" rIns="0" tIns="0" bIns="0">
+          <a:bodyPr wrap="square" anchor="ctr" lIns="0" rIns="0" tIns="0" bIns="0">
             <a:spAutoFit/>
           </a:bodyPr>
           <a:lstStyle/>
@@ -10032,7 +10032,7 @@
               </a:spcAft>
             </a:pPr>
             <a:r>
-              <a:rPr sz="1800" b="1" i="0">
+              <a:rPr sz="2400" b="1" i="0">
                 <a:solidFill>
                   <a:srgbClr val="EDAB0C"/>
                 </a:solidFill>
@@ -10041,7 +10041,7 @@
               <a:t>■  </a:t>
             </a:r>
             <a:r>
-              <a:rPr sz="1800" b="0" i="0">
+              <a:rPr sz="2400" b="0" i="0">
                 <a:solidFill>
                   <a:srgbClr val="2A2929"/>
                 </a:solidFill>
@@ -10063,7 +10063,7 @@
               </a:spcAft>
             </a:pPr>
             <a:r>
-              <a:rPr sz="1800" b="1" i="0">
+              <a:rPr sz="2400" b="1" i="0">
                 <a:solidFill>
                   <a:srgbClr val="EDAB0C"/>
                 </a:solidFill>
@@ -10072,7 +10072,7 @@
               <a:t>■  </a:t>
             </a:r>
             <a:r>
-              <a:rPr sz="1800" b="0" i="0">
+              <a:rPr sz="2400" b="0" i="0">
                 <a:solidFill>
                   <a:srgbClr val="2A2929"/>
                 </a:solidFill>
@@ -10094,7 +10094,7 @@
               </a:spcAft>
             </a:pPr>
             <a:r>
-              <a:rPr sz="1800" b="1" i="0">
+              <a:rPr sz="2400" b="1" i="0">
                 <a:solidFill>
                   <a:srgbClr val="92268F"/>
                 </a:solidFill>
@@ -10103,7 +10103,7 @@
               <a:t>■  </a:t>
             </a:r>
             <a:r>
-              <a:rPr sz="1800" b="1" i="0">
+              <a:rPr sz="2400" b="1" i="0">
                 <a:solidFill>
                   <a:srgbClr val="92268F"/>
                 </a:solidFill>
@@ -10373,7 +10373,7 @@
           <a:noFill/>
         </p:spPr>
         <p:txBody>
-          <a:bodyPr wrap="square" anchor="t" lIns="0" rIns="0" tIns="0" bIns="0">
+          <a:bodyPr wrap="square" anchor="ctr" lIns="0" rIns="0" tIns="0" bIns="0">
             <a:spAutoFit/>
           </a:bodyPr>
           <a:lstStyle/>
@@ -10390,7 +10390,7 @@
               </a:spcAft>
             </a:pPr>
             <a:r>
-              <a:rPr sz="1800" b="1" i="0">
+              <a:rPr sz="2400" b="1" i="0">
                 <a:solidFill>
                   <a:srgbClr val="EDAB0C"/>
                 </a:solidFill>
@@ -10399,7 +10399,7 @@
               <a:t>■  </a:t>
             </a:r>
             <a:r>
-              <a:rPr sz="1800" b="0" i="0">
+              <a:rPr sz="2400" b="0" i="0">
                 <a:solidFill>
                   <a:srgbClr val="2A2929"/>
                 </a:solidFill>
@@ -10421,7 +10421,7 @@
               </a:spcAft>
             </a:pPr>
             <a:r>
-              <a:rPr sz="1800" b="1" i="0">
+              <a:rPr sz="2400" b="1" i="0">
                 <a:solidFill>
                   <a:srgbClr val="EDAB0C"/>
                 </a:solidFill>
@@ -10430,7 +10430,7 @@
               <a:t>■  </a:t>
             </a:r>
             <a:r>
-              <a:rPr sz="1800" b="0" i="0">
+              <a:rPr sz="2400" b="0" i="0">
                 <a:solidFill>
                   <a:srgbClr val="2A2929"/>
                 </a:solidFill>
@@ -10452,7 +10452,7 @@
               </a:spcAft>
             </a:pPr>
             <a:r>
-              <a:rPr sz="1800" b="1" i="0">
+              <a:rPr sz="2400" b="1" i="0">
                 <a:solidFill>
                   <a:srgbClr val="EDAB0C"/>
                 </a:solidFill>
@@ -10461,7 +10461,7 @@
               <a:t>■  </a:t>
             </a:r>
             <a:r>
-              <a:rPr sz="1800" b="0" i="0">
+              <a:rPr sz="2400" b="0" i="0">
                 <a:solidFill>
                   <a:srgbClr val="2A2929"/>
                 </a:solidFill>
@@ -10483,7 +10483,7 @@
               </a:spcAft>
             </a:pPr>
             <a:r>
-              <a:rPr sz="1800" b="1" i="0">
+              <a:rPr sz="2400" b="1" i="0">
                 <a:solidFill>
                   <a:srgbClr val="92268F"/>
                 </a:solidFill>
@@ -10492,7 +10492,7 @@
               <a:t>■  </a:t>
             </a:r>
             <a:r>
-              <a:rPr sz="1800" b="1" i="0">
+              <a:rPr sz="2400" b="1" i="0">
                 <a:solidFill>
                   <a:srgbClr val="92268F"/>
                 </a:solidFill>
@@ -10762,7 +10762,7 @@
           <a:noFill/>
         </p:spPr>
         <p:txBody>
-          <a:bodyPr wrap="square" anchor="t" lIns="0" rIns="0" tIns="0" bIns="0">
+          <a:bodyPr wrap="square" anchor="ctr" lIns="0" rIns="0" tIns="0" bIns="0">
             <a:spAutoFit/>
           </a:bodyPr>
           <a:lstStyle/>
@@ -10779,7 +10779,7 @@
               </a:spcAft>
             </a:pPr>
             <a:r>
-              <a:rPr sz="1800" b="1" i="0">
+              <a:rPr sz="2400" b="1" i="0">
                 <a:solidFill>
                   <a:srgbClr val="EDAB0C"/>
                 </a:solidFill>
@@ -10788,7 +10788,7 @@
               <a:t>■  </a:t>
             </a:r>
             <a:r>
-              <a:rPr sz="1800" b="0" i="0">
+              <a:rPr sz="2400" b="0" i="0">
                 <a:solidFill>
                   <a:srgbClr val="2A2929"/>
                 </a:solidFill>
@@ -10810,7 +10810,7 @@
               </a:spcAft>
             </a:pPr>
             <a:r>
-              <a:rPr sz="1800" b="1" i="0">
+              <a:rPr sz="2400" b="1" i="0">
                 <a:solidFill>
                   <a:srgbClr val="EDAB0C"/>
                 </a:solidFill>
@@ -10819,7 +10819,7 @@
               <a:t>■  </a:t>
             </a:r>
             <a:r>
-              <a:rPr sz="1800" b="0" i="0">
+              <a:rPr sz="2400" b="0" i="0">
                 <a:solidFill>
                   <a:srgbClr val="2A2929"/>
                 </a:solidFill>
@@ -10841,7 +10841,7 @@
               </a:spcAft>
             </a:pPr>
             <a:r>
-              <a:rPr sz="1800" b="1" i="0">
+              <a:rPr sz="2400" b="1" i="0">
                 <a:solidFill>
                   <a:srgbClr val="EDAB0C"/>
                 </a:solidFill>
@@ -10850,7 +10850,7 @@
               <a:t>■  </a:t>
             </a:r>
             <a:r>
-              <a:rPr sz="1800" b="0" i="0">
+              <a:rPr sz="2400" b="0" i="0">
                 <a:solidFill>
                   <a:srgbClr val="2A2929"/>
                 </a:solidFill>
@@ -10872,7 +10872,7 @@
               </a:spcAft>
             </a:pPr>
             <a:r>
-              <a:rPr sz="1800" b="1" i="0">
+              <a:rPr sz="2400" b="1" i="0">
                 <a:solidFill>
                   <a:srgbClr val="EDAB0C"/>
                 </a:solidFill>
@@ -10881,7 +10881,7 @@
               <a:t>■  </a:t>
             </a:r>
             <a:r>
-              <a:rPr sz="1800" b="0" i="0">
+              <a:rPr sz="2400" b="0" i="0">
                 <a:solidFill>
                   <a:srgbClr val="2A2929"/>
                 </a:solidFill>
@@ -11151,7 +11151,7 @@
           <a:noFill/>
         </p:spPr>
         <p:txBody>
-          <a:bodyPr wrap="square" anchor="t" lIns="0" rIns="0" tIns="0" bIns="0">
+          <a:bodyPr wrap="square" anchor="ctr" lIns="0" rIns="0" tIns="0" bIns="0">
             <a:spAutoFit/>
           </a:bodyPr>
           <a:lstStyle/>
@@ -11168,7 +11168,7 @@
               </a:spcAft>
             </a:pPr>
             <a:r>
-              <a:rPr sz="1800" b="1" i="0">
+              <a:rPr sz="2400" b="1" i="0">
                 <a:solidFill>
                   <a:srgbClr val="EDAB0C"/>
                 </a:solidFill>
@@ -11177,7 +11177,7 @@
               <a:t>■  </a:t>
             </a:r>
             <a:r>
-              <a:rPr sz="1800" b="0" i="0">
+              <a:rPr sz="2400" b="0" i="0">
                 <a:solidFill>
                   <a:srgbClr val="2A2929"/>
                 </a:solidFill>
@@ -11199,7 +11199,7 @@
               </a:spcAft>
             </a:pPr>
             <a:r>
-              <a:rPr sz="1800" b="1" i="0">
+              <a:rPr sz="2400" b="1" i="0">
                 <a:solidFill>
                   <a:srgbClr val="92268F"/>
                 </a:solidFill>
@@ -11208,7 +11208,7 @@
               <a:t>■  </a:t>
             </a:r>
             <a:r>
-              <a:rPr sz="1800" b="1" i="0">
+              <a:rPr sz="2400" b="1" i="0">
                 <a:solidFill>
                   <a:srgbClr val="92268F"/>
                 </a:solidFill>
@@ -11230,7 +11230,7 @@
               </a:spcAft>
             </a:pPr>
             <a:r>
-              <a:rPr sz="1800" b="1" i="0">
+              <a:rPr sz="2400" b="1" i="0">
                 <a:solidFill>
                   <a:srgbClr val="EDAB0C"/>
                 </a:solidFill>
@@ -11239,7 +11239,7 @@
               <a:t>■  </a:t>
             </a:r>
             <a:r>
-              <a:rPr sz="1800" b="0" i="0">
+              <a:rPr sz="2400" b="0" i="0">
                 <a:solidFill>
                   <a:srgbClr val="2A2929"/>
                 </a:solidFill>
@@ -11261,7 +11261,7 @@
               </a:spcAft>
             </a:pPr>
             <a:r>
-              <a:rPr sz="1800" b="1" i="0">
+              <a:rPr sz="2400" b="1" i="0">
                 <a:solidFill>
                   <a:srgbClr val="EDAB0C"/>
                 </a:solidFill>
@@ -11270,7 +11270,7 @@
               <a:t>■  </a:t>
             </a:r>
             <a:r>
-              <a:rPr sz="1800" b="0" i="0">
+              <a:rPr sz="2400" b="0" i="0">
                 <a:solidFill>
                   <a:srgbClr val="2A2929"/>
                 </a:solidFill>
@@ -11540,7 +11540,7 @@
           <a:noFill/>
         </p:spPr>
         <p:txBody>
-          <a:bodyPr wrap="square" anchor="t" lIns="0" rIns="0" tIns="0" bIns="0">
+          <a:bodyPr wrap="square" anchor="ctr" lIns="0" rIns="0" tIns="0" bIns="0">
             <a:spAutoFit/>
           </a:bodyPr>
           <a:lstStyle/>
@@ -11557,7 +11557,7 @@
               </a:spcAft>
             </a:pPr>
             <a:r>
-              <a:rPr sz="1800" b="1" i="0">
+              <a:rPr sz="2400" b="1" i="0">
                 <a:solidFill>
                   <a:srgbClr val="EDAB0C"/>
                 </a:solidFill>
@@ -11566,7 +11566,7 @@
               <a:t>■  </a:t>
             </a:r>
             <a:r>
-              <a:rPr sz="1800" b="0" i="0">
+              <a:rPr sz="2400" b="0" i="0">
                 <a:solidFill>
                   <a:srgbClr val="2A2929"/>
                 </a:solidFill>
@@ -11588,7 +11588,7 @@
               </a:spcAft>
             </a:pPr>
             <a:r>
-              <a:rPr sz="1800" b="1" i="0">
+              <a:rPr sz="2400" b="1" i="0">
                 <a:solidFill>
                   <a:srgbClr val="EDAB0C"/>
                 </a:solidFill>
@@ -11597,7 +11597,7 @@
               <a:t>■  </a:t>
             </a:r>
             <a:r>
-              <a:rPr sz="1800" b="0" i="0">
+              <a:rPr sz="2400" b="0" i="0">
                 <a:solidFill>
                   <a:srgbClr val="2A2929"/>
                 </a:solidFill>
@@ -11619,7 +11619,7 @@
               </a:spcAft>
             </a:pPr>
             <a:r>
-              <a:rPr sz="1800" b="1" i="0">
+              <a:rPr sz="2400" b="1" i="0">
                 <a:solidFill>
                   <a:srgbClr val="EDAB0C"/>
                 </a:solidFill>
@@ -11628,7 +11628,7 @@
               <a:t>■  </a:t>
             </a:r>
             <a:r>
-              <a:rPr sz="1800" b="0" i="0">
+              <a:rPr sz="2400" b="0" i="0">
                 <a:solidFill>
                   <a:srgbClr val="2A2929"/>
                 </a:solidFill>
@@ -11650,7 +11650,7 @@
               </a:spcAft>
             </a:pPr>
             <a:r>
-              <a:rPr sz="1800" b="1" i="0">
+              <a:rPr sz="2400" b="1" i="0">
                 <a:solidFill>
                   <a:srgbClr val="EDAB0C"/>
                 </a:solidFill>
@@ -11659,7 +11659,7 @@
               <a:t>■  </a:t>
             </a:r>
             <a:r>
-              <a:rPr sz="1800" b="0" i="0">
+              <a:rPr sz="2400" b="0" i="0">
                 <a:solidFill>
                   <a:srgbClr val="2A2929"/>
                 </a:solidFill>

--- a/S1-CL1-Cloud-Design-Build/delivery/topic_08/Topic_08a_Slides.pptx
+++ b/S1-CL1-Cloud-Design-Build/delivery/topic_08/Topic_08a_Slides.pptx
@@ -7,25 +7,25 @@
   <p:sldIdLst>
     <p:sldId id="256" r:id="rId7"/>
     <p:sldId id="257" r:id="rId8"/>
-    <p:sldId id="258" r:id="rId9"/>
-    <p:sldId id="259" r:id="rId10"/>
-    <p:sldId id="260" r:id="rId11"/>
-    <p:sldId id="261" r:id="rId12"/>
-    <p:sldId id="262" r:id="rId13"/>
-    <p:sldId id="263" r:id="rId14"/>
-    <p:sldId id="264" r:id="rId15"/>
-    <p:sldId id="265" r:id="rId16"/>
-    <p:sldId id="266" r:id="rId17"/>
-    <p:sldId id="267" r:id="rId18"/>
-    <p:sldId id="268" r:id="rId19"/>
-    <p:sldId id="269" r:id="rId20"/>
-    <p:sldId id="270" r:id="rId21"/>
-    <p:sldId id="271" r:id="rId22"/>
-    <p:sldId id="272" r:id="rId23"/>
-    <p:sldId id="273" r:id="rId24"/>
-    <p:sldId id="274" r:id="rId25"/>
-    <p:sldId id="275" r:id="rId26"/>
-    <p:sldId id="276" r:id="rId27"/>
+    <p:sldId id="258" r:id="rId10"/>
+    <p:sldId id="259" r:id="rId11"/>
+    <p:sldId id="260" r:id="rId12"/>
+    <p:sldId id="261" r:id="rId13"/>
+    <p:sldId id="262" r:id="rId14"/>
+    <p:sldId id="263" r:id="rId15"/>
+    <p:sldId id="264" r:id="rId16"/>
+    <p:sldId id="265" r:id="rId17"/>
+    <p:sldId id="266" r:id="rId18"/>
+    <p:sldId id="267" r:id="rId19"/>
+    <p:sldId id="268" r:id="rId20"/>
+    <p:sldId id="269" r:id="rId21"/>
+    <p:sldId id="270" r:id="rId22"/>
+    <p:sldId id="271" r:id="rId23"/>
+    <p:sldId id="272" r:id="rId24"/>
+    <p:sldId id="273" r:id="rId25"/>
+    <p:sldId id="274" r:id="rId26"/>
+    <p:sldId id="275" r:id="rId27"/>
+    <p:sldId id="276" r:id="rId28"/>
   </p:sldIdLst>
   <p:sldSz cx="12191695" cy="6858000" type="screen4x3"/>
   <p:notesSz cx="6858000" cy="9144000"/>
@@ -125,6 +125,2259 @@
     </a:lvl9pPr>
   </p:defaultTextStyle>
 </p:presentation>
+</file>
+
+<file path=ppt/notesMasters/notesMaster1.xml><?xml version="1.0" encoding="utf-8"?>
+<p:notesMaster xmlns:a="http://schemas.openxmlformats.org/drawingml/2006/main" xmlns:p="http://schemas.openxmlformats.org/presentationml/2006/main" xmlns:r="http://schemas.openxmlformats.org/officeDocument/2006/relationships">
+  <p:cSld>
+    <p:bg>
+      <p:bgRef idx="1001">
+        <a:schemeClr val="bg1"/>
+      </p:bgRef>
+    </p:bg>
+    <p:spTree>
+      <p:nvGrpSpPr>
+        <p:cNvPr id="1" name=""/>
+        <p:cNvGrpSpPr/>
+        <p:nvPr/>
+      </p:nvGrpSpPr>
+      <p:grpSpPr>
+        <a:xfrm>
+          <a:off x="0" y="0"/>
+          <a:ext cx="0" cy="0"/>
+          <a:chOff x="0" y="0"/>
+          <a:chExt cx="0" cy="0"/>
+        </a:xfrm>
+      </p:grpSpPr>
+      <p:sp>
+        <p:nvSpPr>
+          <p:cNvPr id="2" name="Header Placeholder 1"/>
+          <p:cNvSpPr>
+            <a:spLocks noGrp="1"/>
+          </p:cNvSpPr>
+          <p:nvPr>
+            <p:ph type="hdr" sz="quarter"/>
+          </p:nvPr>
+        </p:nvSpPr>
+        <p:spPr>
+          <a:xfrm>
+            <a:off x="0" y="0"/>
+            <a:ext cx="2971800" cy="457200"/>
+          </a:xfrm>
+          <a:prstGeom prst="rect">
+            <a:avLst/>
+          </a:prstGeom>
+        </p:spPr>
+        <p:txBody>
+          <a:bodyPr vert="horz" lIns="91440" tIns="45720" rIns="91440" bIns="45720" rtlCol="0"/>
+          <a:lstStyle>
+            <a:lvl1pPr algn="l">
+              <a:defRPr sz="1200"/>
+            </a:lvl1pPr>
+          </a:lstStyle>
+          <a:p>
+            <a:endParaRPr lang="en-US"/>
+          </a:p>
+        </p:txBody>
+      </p:sp>
+      <p:sp>
+        <p:nvSpPr>
+          <p:cNvPr id="3" name="Date Placeholder 2"/>
+          <p:cNvSpPr>
+            <a:spLocks noGrp="1"/>
+          </p:cNvSpPr>
+          <p:nvPr>
+            <p:ph type="dt" idx="1"/>
+          </p:nvPr>
+        </p:nvSpPr>
+        <p:spPr>
+          <a:xfrm>
+            <a:off x="3884613" y="0"/>
+            <a:ext cx="2971800" cy="457200"/>
+          </a:xfrm>
+          <a:prstGeom prst="rect">
+            <a:avLst/>
+          </a:prstGeom>
+        </p:spPr>
+        <p:txBody>
+          <a:bodyPr vert="horz" lIns="91440" tIns="45720" rIns="91440" bIns="45720" rtlCol="0"/>
+          <a:lstStyle>
+            <a:lvl1pPr algn="r">
+              <a:defRPr sz="1200"/>
+            </a:lvl1pPr>
+          </a:lstStyle>
+          <a:p>
+            <a:fld id="{0F89C1C7-3DCD-1040-A9CF-14679D8B5DDD}" type="datetimeFigureOut">
+              <a:rPr lang="en-US" smtClean="0"/>
+              <a:t>10/17/16</a:t>
+            </a:fld>
+            <a:endParaRPr lang="en-US"/>
+          </a:p>
+        </p:txBody>
+      </p:sp>
+      <p:sp>
+        <p:nvSpPr>
+          <p:cNvPr id="4" name="Slide Image Placeholder 3"/>
+          <p:cNvSpPr>
+            <a:spLocks noGrp="1" noRot="1" noChangeAspect="1"/>
+          </p:cNvSpPr>
+          <p:nvPr>
+            <p:ph type="sldImg" idx="2"/>
+          </p:nvPr>
+        </p:nvSpPr>
+        <p:spPr>
+          <a:xfrm>
+            <a:off x="1143000" y="685800"/>
+            <a:ext cx="4572000" cy="3429000"/>
+          </a:xfrm>
+          <a:prstGeom prst="rect">
+            <a:avLst/>
+          </a:prstGeom>
+          <a:noFill/>
+          <a:ln w="12700">
+            <a:solidFill>
+              <a:prstClr val="black"/>
+            </a:solidFill>
+          </a:ln>
+        </p:spPr>
+        <p:txBody>
+          <a:bodyPr vert="horz" lIns="91440" tIns="45720" rIns="91440" bIns="45720" rtlCol="0" anchor="ctr"/>
+          <a:lstStyle/>
+          <a:p>
+            <a:endParaRPr lang="en-US"/>
+          </a:p>
+        </p:txBody>
+      </p:sp>
+      <p:sp>
+        <p:nvSpPr>
+          <p:cNvPr id="5" name="Notes Placeholder 4"/>
+          <p:cNvSpPr>
+            <a:spLocks noGrp="1"/>
+          </p:cNvSpPr>
+          <p:nvPr>
+            <p:ph type="body" sz="quarter" idx="3"/>
+          </p:nvPr>
+        </p:nvSpPr>
+        <p:spPr>
+          <a:xfrm>
+            <a:off x="685800" y="4343400"/>
+            <a:ext cx="5486400" cy="4114800"/>
+          </a:xfrm>
+          <a:prstGeom prst="rect">
+            <a:avLst/>
+          </a:prstGeom>
+        </p:spPr>
+        <p:txBody>
+          <a:bodyPr vert="horz" lIns="91440" tIns="45720" rIns="91440" bIns="45720" rtlCol="0"/>
+          <a:lstStyle/>
+          <a:p>
+            <a:pPr lvl="0"/>
+            <a:r>
+              <a:rPr lang="en-US" smtClean="0"/>
+              <a:t>Click to edit Master text styles</a:t>
+            </a:r>
+          </a:p>
+          <a:p>
+            <a:pPr lvl="1"/>
+            <a:r>
+              <a:rPr lang="en-US" smtClean="0"/>
+              <a:t>Second level</a:t>
+            </a:r>
+          </a:p>
+          <a:p>
+            <a:pPr lvl="2"/>
+            <a:r>
+              <a:rPr lang="en-US" smtClean="0"/>
+              <a:t>Third level</a:t>
+            </a:r>
+          </a:p>
+          <a:p>
+            <a:pPr lvl="3"/>
+            <a:r>
+              <a:rPr lang="en-US" smtClean="0"/>
+              <a:t>Fourth level</a:t>
+            </a:r>
+          </a:p>
+          <a:p>
+            <a:pPr lvl="4"/>
+            <a:r>
+              <a:rPr lang="en-US" smtClean="0"/>
+              <a:t>Fifth level</a:t>
+            </a:r>
+            <a:endParaRPr lang="en-US"/>
+          </a:p>
+        </p:txBody>
+      </p:sp>
+      <p:sp>
+        <p:nvSpPr>
+          <p:cNvPr id="6" name="Footer Placeholder 5"/>
+          <p:cNvSpPr>
+            <a:spLocks noGrp="1"/>
+          </p:cNvSpPr>
+          <p:nvPr>
+            <p:ph type="ftr" sz="quarter" idx="4"/>
+          </p:nvPr>
+        </p:nvSpPr>
+        <p:spPr>
+          <a:xfrm>
+            <a:off x="0" y="8685213"/>
+            <a:ext cx="2971800" cy="457200"/>
+          </a:xfrm>
+          <a:prstGeom prst="rect">
+            <a:avLst/>
+          </a:prstGeom>
+        </p:spPr>
+        <p:txBody>
+          <a:bodyPr vert="horz" lIns="91440" tIns="45720" rIns="91440" bIns="45720" rtlCol="0" anchor="b"/>
+          <a:lstStyle>
+            <a:lvl1pPr algn="l">
+              <a:defRPr sz="1200"/>
+            </a:lvl1pPr>
+          </a:lstStyle>
+          <a:p>
+            <a:endParaRPr lang="en-US"/>
+          </a:p>
+        </p:txBody>
+      </p:sp>
+      <p:sp>
+        <p:nvSpPr>
+          <p:cNvPr id="7" name="Slide Number Placeholder 6"/>
+          <p:cNvSpPr>
+            <a:spLocks noGrp="1"/>
+          </p:cNvSpPr>
+          <p:nvPr>
+            <p:ph type="sldNum" sz="quarter" idx="5"/>
+          </p:nvPr>
+        </p:nvSpPr>
+        <p:spPr>
+          <a:xfrm>
+            <a:off x="3884613" y="8685213"/>
+            <a:ext cx="2971800" cy="457200"/>
+          </a:xfrm>
+          <a:prstGeom prst="rect">
+            <a:avLst/>
+          </a:prstGeom>
+        </p:spPr>
+        <p:txBody>
+          <a:bodyPr vert="horz" lIns="91440" tIns="45720" rIns="91440" bIns="45720" rtlCol="0" anchor="b"/>
+          <a:lstStyle>
+            <a:lvl1pPr algn="r">
+              <a:defRPr sz="1200"/>
+            </a:lvl1pPr>
+          </a:lstStyle>
+          <a:p>
+            <a:fld id="{BB5E49A5-4136-284D-997B-48E1D791AD67}" type="slidenum">
+              <a:rPr lang="en-US" smtClean="0"/>
+              <a:t>‹#›</a:t>
+            </a:fld>
+            <a:endParaRPr lang="en-US"/>
+          </a:p>
+        </p:txBody>
+      </p:sp>
+    </p:spTree>
+    <p:extLst>
+      <p:ext uri="{BB962C8B-B14F-4D97-AF65-F5344CB8AC3E}">
+        <p14:creationId xmlns:p14="http://schemas.microsoft.com/office/powerpoint/2010/main" val="2623252185"/>
+      </p:ext>
+    </p:extLst>
+  </p:cSld>
+  <p:clrMap bg1="lt1" tx1="dk1" bg2="lt2" tx2="dk2" accent1="accent1" accent2="accent2" accent3="accent3" accent4="accent4" accent5="accent5" accent6="accent6" hlink="hlink" folHlink="folHlink"/>
+  <p:notesStyle>
+    <a:lvl1pPr marL="0" algn="l" defTabSz="457200" rtl="0" eaLnBrk="1" latinLnBrk="0" hangingPunct="1">
+      <a:defRPr sz="1200" kern="1200">
+        <a:solidFill>
+          <a:schemeClr val="tx1"/>
+        </a:solidFill>
+        <a:latin typeface="+mn-lt"/>
+        <a:ea typeface="+mn-ea"/>
+        <a:cs typeface="+mn-cs"/>
+      </a:defRPr>
+    </a:lvl1pPr>
+    <a:lvl2pPr marL="457200" algn="l" defTabSz="457200" rtl="0" eaLnBrk="1" latinLnBrk="0" hangingPunct="1">
+      <a:defRPr sz="1200" kern="1200">
+        <a:solidFill>
+          <a:schemeClr val="tx1"/>
+        </a:solidFill>
+        <a:latin typeface="+mn-lt"/>
+        <a:ea typeface="+mn-ea"/>
+        <a:cs typeface="+mn-cs"/>
+      </a:defRPr>
+    </a:lvl2pPr>
+    <a:lvl3pPr marL="914400" algn="l" defTabSz="457200" rtl="0" eaLnBrk="1" latinLnBrk="0" hangingPunct="1">
+      <a:defRPr sz="1200" kern="1200">
+        <a:solidFill>
+          <a:schemeClr val="tx1"/>
+        </a:solidFill>
+        <a:latin typeface="+mn-lt"/>
+        <a:ea typeface="+mn-ea"/>
+        <a:cs typeface="+mn-cs"/>
+      </a:defRPr>
+    </a:lvl3pPr>
+    <a:lvl4pPr marL="1371600" algn="l" defTabSz="457200" rtl="0" eaLnBrk="1" latinLnBrk="0" hangingPunct="1">
+      <a:defRPr sz="1200" kern="1200">
+        <a:solidFill>
+          <a:schemeClr val="tx1"/>
+        </a:solidFill>
+        <a:latin typeface="+mn-lt"/>
+        <a:ea typeface="+mn-ea"/>
+        <a:cs typeface="+mn-cs"/>
+      </a:defRPr>
+    </a:lvl4pPr>
+    <a:lvl5pPr marL="1828800" algn="l" defTabSz="457200" rtl="0" eaLnBrk="1" latinLnBrk="0" hangingPunct="1">
+      <a:defRPr sz="1200" kern="1200">
+        <a:solidFill>
+          <a:schemeClr val="tx1"/>
+        </a:solidFill>
+        <a:latin typeface="+mn-lt"/>
+        <a:ea typeface="+mn-ea"/>
+        <a:cs typeface="+mn-cs"/>
+      </a:defRPr>
+    </a:lvl5pPr>
+    <a:lvl6pPr marL="2286000" algn="l" defTabSz="457200" rtl="0" eaLnBrk="1" latinLnBrk="0" hangingPunct="1">
+      <a:defRPr sz="1200" kern="1200">
+        <a:solidFill>
+          <a:schemeClr val="tx1"/>
+        </a:solidFill>
+        <a:latin typeface="+mn-lt"/>
+        <a:ea typeface="+mn-ea"/>
+        <a:cs typeface="+mn-cs"/>
+      </a:defRPr>
+    </a:lvl6pPr>
+    <a:lvl7pPr marL="2743200" algn="l" defTabSz="457200" rtl="0" eaLnBrk="1" latinLnBrk="0" hangingPunct="1">
+      <a:defRPr sz="1200" kern="1200">
+        <a:solidFill>
+          <a:schemeClr val="tx1"/>
+        </a:solidFill>
+        <a:latin typeface="+mn-lt"/>
+        <a:ea typeface="+mn-ea"/>
+        <a:cs typeface="+mn-cs"/>
+      </a:defRPr>
+    </a:lvl7pPr>
+    <a:lvl8pPr marL="3200400" algn="l" defTabSz="457200" rtl="0" eaLnBrk="1" latinLnBrk="0" hangingPunct="1">
+      <a:defRPr sz="1200" kern="1200">
+        <a:solidFill>
+          <a:schemeClr val="tx1"/>
+        </a:solidFill>
+        <a:latin typeface="+mn-lt"/>
+        <a:ea typeface="+mn-ea"/>
+        <a:cs typeface="+mn-cs"/>
+      </a:defRPr>
+    </a:lvl8pPr>
+    <a:lvl9pPr marL="3657600" algn="l" defTabSz="457200" rtl="0" eaLnBrk="1" latinLnBrk="0" hangingPunct="1">
+      <a:defRPr sz="1200" kern="1200">
+        <a:solidFill>
+          <a:schemeClr val="tx1"/>
+        </a:solidFill>
+        <a:latin typeface="+mn-lt"/>
+        <a:ea typeface="+mn-ea"/>
+        <a:cs typeface="+mn-cs"/>
+      </a:defRPr>
+    </a:lvl9pPr>
+  </p:notesStyle>
+</p:notesMaster>
+</file>
+
+<file path=ppt/notesSlides/notesSlide1.xml><?xml version="1.0" encoding="utf-8"?>
+<p:notes xmlns:a="http://schemas.openxmlformats.org/drawingml/2006/main" xmlns:p="http://schemas.openxmlformats.org/presentationml/2006/main" xmlns:r="http://schemas.openxmlformats.org/officeDocument/2006/relationships">
+  <p:cSld>
+    <p:spTree>
+      <p:nvGrpSpPr>
+        <p:cNvPr id="1" name=""/>
+        <p:cNvGrpSpPr/>
+        <p:nvPr/>
+      </p:nvGrpSpPr>
+      <p:grpSpPr>
+        <a:xfrm>
+          <a:off x="0" y="0"/>
+          <a:ext cx="0" cy="0"/>
+          <a:chOff x="0" y="0"/>
+          <a:chExt cx="0" cy="0"/>
+        </a:xfrm>
+      </p:grpSpPr>
+      <p:sp>
+        <p:nvSpPr>
+          <p:cNvPr id="2" name="Slide Image Placeholder 1"/>
+          <p:cNvSpPr>
+            <a:spLocks noGrp="1"/>
+          </p:cNvSpPr>
+          <p:nvPr>
+            <p:ph type="sldImg" idx="2"/>
+          </p:nvPr>
+        </p:nvSpPr>
+        <p:spPr/>
+      </p:sp>
+      <p:sp>
+        <p:nvSpPr>
+          <p:cNvPr id="3" name="Notes Placeholder 2"/>
+          <p:cNvSpPr>
+            <a:spLocks noGrp="1"/>
+          </p:cNvSpPr>
+          <p:nvPr>
+            <p:ph type="body" idx="3" sz="quarter"/>
+          </p:nvPr>
+        </p:nvSpPr>
+        <p:spPr/>
+        <p:txBody>
+          <a:bodyPr/>
+          <a:lstStyle/>
+          <a:p>
+            <a:r>
+              <a:t>Frame the whole Topic — set the shape, don't teach content yet. Topic 7 laid an empty network;</a:t>
+            </a:r>
+          </a:p>
+          <a:p>
+            <a:r>
+              <a:t>Topic 8 moves the workload in.</a:t>
+            </a:r>
+          </a:p>
+          <a:p>
+            <a:r>
+              <a:t>• Where this fits: they're MTS consultants building the SUPPLIED design in the lab. The thinking</a:t>
+            </a:r>
+          </a:p>
+          <a:p>
+            <a:r>
+              <a:t>  was done in AT1; AT2 is disciplined execution + evidence.</a:t>
+            </a:r>
+          </a:p>
+          <a:p>
+            <a:r>
+              <a:t>• Orient them: this is deck 8a (compute + elasticity); 8b covers the managed database + storage.</a:t>
+            </a:r>
+          </a:p>
+          <a:p>
+            <a:r>
+              <a:t>  Same Topic 8, split for manageability — say so, so no one thinks they've skipped anything.</a:t>
+            </a:r>
+          </a:p>
+          <a:p>
+            <a:r>
+              <a:t>• Stress the working rhythm (last bullet): every AWS build task = watch the recorded demo, THEN do</a:t>
+            </a:r>
+          </a:p>
+          <a:p>
+            <a:r>
+              <a:t>  it yourself, capturing named evidence as you go. That rhythm repeats all Topic.</a:t>
+            </a:r>
+          </a:p>
+          <a:p>
+            <a:r>
+              <a:t>Misconception to pre-empt: "we're designing now." No — the design is given; deviating from it is an</a:t>
+            </a:r>
+          </a:p>
+          <a:p>
+            <a:r>
+              <a:t>error, not initiative. Build what's specified; the implementer decisions are already flagged.</a:t>
+            </a:r>
+          </a:p>
+          <a:p>
+            <a:r>
+              <a:t>Question to pose: "What's the difference between what you did in AT1 and what you do here?" (advise</a:t>
+            </a:r>
+          </a:p>
+          <a:p>
+            <a:r>
+              <a:t>vs build-and-evidence).</a:t>
+            </a:r>
+          </a:p>
+          <a:p>
+            <a:r>
+              <a:t>UoC/AT2 tie: Topic 8 carries the core ICTCLD401 PE — compute/storage/database/autoscaling in a VPC;</a:t>
+            </a:r>
+          </a:p>
+          <a:p>
+            <a:r>
+              <a:t>this deck opens on C1 compute + C2 elasticity.</a:t>
+            </a:r>
+          </a:p>
+        </p:txBody>
+      </p:sp>
+      <p:sp>
+        <p:nvSpPr>
+          <p:cNvPr id="4" name="Slide Number Placeholder 3"/>
+          <p:cNvSpPr>
+            <a:spLocks noGrp="1"/>
+          </p:cNvSpPr>
+          <p:nvPr>
+            <p:ph type="sldNum" idx="5" sz="quarter"/>
+          </p:nvPr>
+        </p:nvSpPr>
+        <p:spPr/>
+      </p:sp>
+    </p:spTree>
+  </p:cSld>
+  <p:clrMapOvr>
+    <a:masterClrMapping/>
+  </p:clrMapOvr>
+</p:notes>
+</file>
+
+<file path=ppt/notesSlides/notesSlide10.xml><?xml version="1.0" encoding="utf-8"?>
+<p:notes xmlns:a="http://schemas.openxmlformats.org/drawingml/2006/main" xmlns:p="http://schemas.openxmlformats.org/presentationml/2006/main" xmlns:r="http://schemas.openxmlformats.org/officeDocument/2006/relationships">
+  <p:cSld>
+    <p:spTree>
+      <p:nvGrpSpPr>
+        <p:cNvPr id="1" name=""/>
+        <p:cNvGrpSpPr/>
+        <p:nvPr/>
+      </p:nvGrpSpPr>
+      <p:grpSpPr>
+        <a:xfrm>
+          <a:off x="0" y="0"/>
+          <a:ext cx="0" cy="0"/>
+          <a:chOff x="0" y="0"/>
+          <a:chExt cx="0" cy="0"/>
+        </a:xfrm>
+      </p:grpSpPr>
+      <p:sp>
+        <p:nvSpPr>
+          <p:cNvPr id="2" name="Slide Image Placeholder 1"/>
+          <p:cNvSpPr>
+            <a:spLocks noGrp="1"/>
+          </p:cNvSpPr>
+          <p:nvPr>
+            <p:ph type="sldImg" idx="2"/>
+          </p:nvPr>
+        </p:nvSpPr>
+        <p:spPr/>
+      </p:sp>
+      <p:sp>
+        <p:nvSpPr>
+          <p:cNvPr id="3" name="Notes Placeholder 2"/>
+          <p:cNvSpPr>
+            <a:spLocks noGrp="1"/>
+          </p:cNvSpPr>
+          <p:nvPr>
+            <p:ph type="body" idx="3" sz="quarter"/>
+          </p:nvPr>
+        </p:nvSpPr>
+        <p:spPr/>
+        <p:txBody>
+          <a:bodyPr/>
+          <a:lstStyle/>
+          <a:p>
+            <a:r>
+              <a:t>Visual teach (diagram) — the ALB's job, using the target-group picture. Keep it to the three moving</a:t>
+            </a:r>
+          </a:p>
+          <a:p>
+            <a:r>
+              <a:t>parts.</a:t>
+            </a:r>
+          </a:p>
+          <a:p>
+            <a:r>
+              <a:t>• An ALB receives requests on a LISTENER (here HTTPS:443) — the front door and the port it answers on.</a:t>
+            </a:r>
+          </a:p>
+          <a:p>
+            <a:r>
+              <a:t>• It forwards to a TARGET GROUP and routes only to HEALTHY targets — health checks are what make it</a:t>
+            </a:r>
+          </a:p>
+          <a:p>
+            <a:r>
+              <a:t>  safe; a sick instance is taken out of rotation automatically.</a:t>
+            </a:r>
+          </a:p>
+          <a:p>
+            <a:r>
+              <a:t>• The accent line: internet-facing vs internal — THIS design is INTERNAL (staff reach it over the</a:t>
+            </a:r>
+          </a:p>
+          <a:p>
+            <a:r>
+              <a:t>  VPN), matching the private, no-public-IP app server.</a:t>
+            </a:r>
+          </a:p>
+          <a:p>
+            <a:r>
+              <a:t>Misconception to pre-empt: "the load balancer runs the app." No — it DISTRIBUTES requests to the EC2</a:t>
+            </a:r>
+          </a:p>
+          <a:p>
+            <a:r>
+              <a:t>instances that run the app; it holds no application logic itself (callback to Topic 1).</a:t>
+            </a:r>
+          </a:p>
+          <a:p>
+            <a:r>
+              <a:t>Question to pose: "Why is this ALB internal, not internet-facing?" (the app is private, staff-only</a:t>
+            </a:r>
+          </a:p>
+          <a:p>
+            <a:r>
+              <a:t>over the VPN — the whole tier stays off the public internet).</a:t>
+            </a:r>
+          </a:p>
+          <a:p>
+            <a:r>
+              <a:t>UoC/AT2 tie: ICTCLD401 PC 3.1 (the balancer the ASG scales behind); §4.6 Load balancing evidence.</a:t>
+            </a:r>
+          </a:p>
+        </p:txBody>
+      </p:sp>
+      <p:sp>
+        <p:nvSpPr>
+          <p:cNvPr id="4" name="Slide Number Placeholder 3"/>
+          <p:cNvSpPr>
+            <a:spLocks noGrp="1"/>
+          </p:cNvSpPr>
+          <p:nvPr>
+            <p:ph type="sldNum" idx="5" sz="quarter"/>
+          </p:nvPr>
+        </p:nvSpPr>
+        <p:spPr/>
+      </p:sp>
+    </p:spTree>
+  </p:cSld>
+  <p:clrMapOvr>
+    <a:masterClrMapping/>
+  </p:clrMapOvr>
+</p:notes>
+</file>
+
+<file path=ppt/notesSlides/notesSlide11.xml><?xml version="1.0" encoding="utf-8"?>
+<p:notes xmlns:a="http://schemas.openxmlformats.org/drawingml/2006/main" xmlns:p="http://schemas.openxmlformats.org/presentationml/2006/main" xmlns:r="http://schemas.openxmlformats.org/officeDocument/2006/relationships">
+  <p:cSld>
+    <p:spTree>
+      <p:nvGrpSpPr>
+        <p:cNvPr id="1" name=""/>
+        <p:cNvGrpSpPr/>
+        <p:nvPr/>
+      </p:nvGrpSpPr>
+      <p:grpSpPr>
+        <a:xfrm>
+          <a:off x="0" y="0"/>
+          <a:ext cx="0" cy="0"/>
+          <a:chOff x="0" y="0"/>
+          <a:chExt cx="0" cy="0"/>
+        </a:xfrm>
+      </p:grpSpPr>
+      <p:sp>
+        <p:nvSpPr>
+          <p:cNvPr id="2" name="Slide Image Placeholder 1"/>
+          <p:cNvSpPr>
+            <a:spLocks noGrp="1"/>
+          </p:cNvSpPr>
+          <p:nvPr>
+            <p:ph type="sldImg" idx="2"/>
+          </p:nvPr>
+        </p:nvSpPr>
+        <p:spPr/>
+      </p:sp>
+      <p:sp>
+        <p:nvSpPr>
+          <p:cNvPr id="3" name="Notes Placeholder 2"/>
+          <p:cNvSpPr>
+            <a:spLocks noGrp="1"/>
+          </p:cNvSpPr>
+          <p:nvPr>
+            <p:ph type="body" idx="3" sz="quarter"/>
+          </p:nvPr>
+        </p:nvSpPr>
+        <p:spPr/>
+        <p:txBody>
+          <a:bodyPr/>
+          <a:lstStyle/>
+          <a:p>
+            <a:r>
+              <a:t>Visual teach (diagram) — the ASG, the piece that actually does the elasticity. Pair with the</a:t>
+            </a:r>
+          </a:p>
+          <a:p>
+            <a:r>
+              <a:t>horizontal-scaling image.</a:t>
+            </a:r>
+          </a:p>
+          <a:p>
+            <a:r>
+              <a:t>• An ASG manages a FLEET of instances from a launch template — one definition, many copies.</a:t>
+            </a:r>
+          </a:p>
+          <a:p>
+            <a:r>
+              <a:t>• Capacity settings: minimum / desired / maximum; it replaces unhealthy instances automatically</a:t>
+            </a:r>
+          </a:p>
+          <a:p>
+            <a:r>
+              <a:t>  (self-healing, not just scaling — flag both jobs).</a:t>
+            </a:r>
+          </a:p>
+          <a:p>
+            <a:r>
+              <a:t>• Scaling POLICIES — scheduled, dynamic (target-tracking), or step — adjust capacity; ours is</a:t>
+            </a:r>
+          </a:p>
+          <a:p>
+            <a:r>
+              <a:t>  target-tracking (next slide).</a:t>
+            </a:r>
+          </a:p>
+          <a:p>
+            <a:r>
+              <a:t>• The accent line: it integrates with the ALB's health checks ACROSS Availability Zones — the AZ</a:t>
+            </a:r>
+          </a:p>
+          <a:p>
+            <a:r>
+              <a:t>  hook that becomes HA in AT3.</a:t>
+            </a:r>
+          </a:p>
+          <a:p>
+            <a:r>
+              <a:t>Misconception to pre-empt: "min/desired/max are the same thing / just a size." No — min and max are</a:t>
+            </a:r>
+          </a:p>
+          <a:p>
+            <a:r>
+              <a:t>the guard-rails, desired is where it sits now; the policy moves desired between them.</a:t>
+            </a:r>
+          </a:p>
+          <a:p>
+            <a:r>
+              <a:t>Question to pose: "If an instance dies at 2am, what does the ASG do without anyone paged?" (replaces</a:t>
+            </a:r>
+          </a:p>
+          <a:p>
+            <a:r>
+              <a:t>it to hold desired capacity — self-healing).</a:t>
+            </a:r>
+          </a:p>
+          <a:p>
+            <a:r>
+              <a:t>UoC/AT2 tie: ICTCLD401 PC 3.1 (configure autoscaling to business metrics); sets up the PC 3.2 test.</a:t>
+            </a:r>
+          </a:p>
+        </p:txBody>
+      </p:sp>
+      <p:sp>
+        <p:nvSpPr>
+          <p:cNvPr id="4" name="Slide Number Placeholder 3"/>
+          <p:cNvSpPr>
+            <a:spLocks noGrp="1"/>
+          </p:cNvSpPr>
+          <p:nvPr>
+            <p:ph type="sldNum" idx="5" sz="quarter"/>
+          </p:nvPr>
+        </p:nvSpPr>
+        <p:spPr/>
+      </p:sp>
+    </p:spTree>
+  </p:cSld>
+  <p:clrMapOvr>
+    <a:masterClrMapping/>
+  </p:clrMapOvr>
+</p:notes>
+</file>
+
+<file path=ppt/notesSlides/notesSlide12.xml><?xml version="1.0" encoding="utf-8"?>
+<p:notes xmlns:a="http://schemas.openxmlformats.org/drawingml/2006/main" xmlns:p="http://schemas.openxmlformats.org/presentationml/2006/main" xmlns:r="http://schemas.openxmlformats.org/officeDocument/2006/relationships">
+  <p:cSld>
+    <p:spTree>
+      <p:nvGrpSpPr>
+        <p:cNvPr id="1" name=""/>
+        <p:cNvGrpSpPr/>
+        <p:nvPr/>
+      </p:nvGrpSpPr>
+      <p:grpSpPr>
+        <a:xfrm>
+          <a:off x="0" y="0"/>
+          <a:ext cx="0" cy="0"/>
+          <a:chOff x="0" y="0"/>
+          <a:chExt cx="0" cy="0"/>
+        </a:xfrm>
+      </p:grpSpPr>
+      <p:sp>
+        <p:nvSpPr>
+          <p:cNvPr id="2" name="Slide Image Placeholder 1"/>
+          <p:cNvSpPr>
+            <a:spLocks noGrp="1"/>
+          </p:cNvSpPr>
+          <p:nvPr>
+            <p:ph type="sldImg" idx="2"/>
+          </p:nvPr>
+        </p:nvSpPr>
+        <p:spPr/>
+      </p:sp>
+      <p:sp>
+        <p:nvSpPr>
+          <p:cNvPr id="3" name="Notes Placeholder 2"/>
+          <p:cNvSpPr>
+            <a:spLocks noGrp="1"/>
+          </p:cNvSpPr>
+          <p:nvPr>
+            <p:ph type="body" idx="3" sz="quarter"/>
+          </p:nvPr>
+        </p:nvSpPr>
+        <p:spPr/>
+        <p:txBody>
+          <a:bodyPr/>
+          <a:lstStyle/>
+          <a:p>
+            <a:r>
+              <a:t>Pivot to THIS design's elasticity spec — read it so the demo and activity are unambiguous. Note the</a:t>
+            </a:r>
+          </a:p>
+          <a:p>
+            <a:r>
+              <a:t>depth ceiling explicitly.</a:t>
+            </a:r>
+          </a:p>
+          <a:p>
+            <a:r>
+              <a:t>• Internal ALB, HTTPS:443 listener → a target group of the Ledgerline instances.</a:t>
+            </a:r>
+          </a:p>
+          <a:p>
+            <a:r>
+              <a:t>• ASG: min 1 / desired 1 / max 2; target-tracking on CPU at 70%; 300 s cooldown. Explain 70% = the</a:t>
+            </a:r>
+          </a:p>
+          <a:p>
+            <a:r>
+              <a:t>  trigger, cooldown = the wait before scaling again so it doesn't thrash.</a:t>
+            </a:r>
+          </a:p>
+          <a:p>
+            <a:r>
+              <a:t>• Health checks: ELB + EC2 — an unhealthy instance is replaced.</a:t>
+            </a:r>
+          </a:p>
+          <a:p>
+            <a:r>
+              <a:t>• The accent line (the ceiling): this is BASELINE elasticity, single-AZ — cross-AZ resilience (HA)</a:t>
+            </a:r>
+          </a:p>
+          <a:p>
+            <a:r>
+              <a:t>  is AT3. Don't let a keen student build Multi-AZ now; it's out of scope for this Topic.</a:t>
+            </a:r>
+          </a:p>
+          <a:p>
+            <a:r>
+              <a:t>Misconception to pre-empt: "min 1 / max 2 is barely scaling." Correct — it's an elasticity INTRO,</a:t>
+            </a:r>
+          </a:p>
+          <a:p>
+            <a:r>
+              <a:t>not HA. The point is proving the mechanism works, not surviving an AZ outage (that's AT3).</a:t>
+            </a:r>
+          </a:p>
+          <a:p>
+            <a:r>
+              <a:t>Question to pose: "Why cap max at 2 and stay single-AZ here?" (this Topic teaches the mechanism; HA</a:t>
+            </a:r>
+          </a:p>
+          <a:p>
+            <a:r>
+              <a:t>is deliberately deferred).</a:t>
+            </a:r>
+          </a:p>
+          <a:p>
+            <a:r>
+              <a:t>UoC/AT2 tie: ICTCLD401 PC 3.1; §4.6 evidence; the single-AZ boundary keeps AT3 distinct.</a:t>
+            </a:r>
+          </a:p>
+        </p:txBody>
+      </p:sp>
+      <p:sp>
+        <p:nvSpPr>
+          <p:cNvPr id="4" name="Slide Number Placeholder 3"/>
+          <p:cNvSpPr>
+            <a:spLocks noGrp="1"/>
+          </p:cNvSpPr>
+          <p:nvPr>
+            <p:ph type="sldNum" idx="5" sz="quarter"/>
+          </p:nvPr>
+        </p:nvSpPr>
+        <p:spPr/>
+      </p:sp>
+    </p:spTree>
+  </p:cSld>
+  <p:clrMapOvr>
+    <a:masterClrMapping/>
+  </p:clrMapOvr>
+</p:notes>
+</file>
+
+<file path=ppt/notesSlides/notesSlide13.xml><?xml version="1.0" encoding="utf-8"?>
+<p:notes xmlns:a="http://schemas.openxmlformats.org/drawingml/2006/main" xmlns:p="http://schemas.openxmlformats.org/presentationml/2006/main" xmlns:r="http://schemas.openxmlformats.org/officeDocument/2006/relationships">
+  <p:cSld>
+    <p:spTree>
+      <p:nvGrpSpPr>
+        <p:cNvPr id="1" name=""/>
+        <p:cNvGrpSpPr/>
+        <p:nvPr/>
+      </p:nvGrpSpPr>
+      <p:grpSpPr>
+        <a:xfrm>
+          <a:off x="0" y="0"/>
+          <a:ext cx="0" cy="0"/>
+          <a:chOff x="0" y="0"/>
+          <a:chExt cx="0" cy="0"/>
+        </a:xfrm>
+      </p:grpSpPr>
+      <p:sp>
+        <p:nvSpPr>
+          <p:cNvPr id="2" name="Slide Image Placeholder 1"/>
+          <p:cNvSpPr>
+            <a:spLocks noGrp="1"/>
+          </p:cNvSpPr>
+          <p:nvPr>
+            <p:ph type="sldImg" idx="2"/>
+          </p:nvPr>
+        </p:nvSpPr>
+        <p:spPr/>
+      </p:sp>
+      <p:sp>
+        <p:nvSpPr>
+          <p:cNvPr id="3" name="Notes Placeholder 2"/>
+          <p:cNvSpPr>
+            <a:spLocks noGrp="1"/>
+          </p:cNvSpPr>
+          <p:nvPr>
+            <p:ph type="body" idx="3" sz="quarter"/>
+          </p:nvPr>
+        </p:nvSpPr>
+        <p:spPr/>
+        <p:txBody>
+          <a:bodyPr/>
+          <a:lstStyle/>
+          <a:p>
+            <a:r>
+              <a:t>DEMONSTRATION slide (recorded demo). Screen it, then map to our design — teach -&gt; DEMONSTRATE -&gt;</a:t>
+            </a:r>
+          </a:p>
+          <a:p>
+            <a:r>
+              <a:t>practice. This one leads straight into the scaling TEST (PC 3.2), so foreground the test.</a:t>
+            </a:r>
+          </a:p>
+          <a:p/>
+          <a:p>
+            <a:r>
+              <a:t>WHERE TO FIND THE RECORDED DEMO: AWS Academy Cloud Architecting → Module 10 (ELB / Auto Scaling) →</a:t>
+            </a:r>
+          </a:p>
+          <a:p>
+            <a:r>
+              <a:t>slide 26, "Demo: Creating Scaling Policies for EC2 Auto Scaling", inside the ACA M10 instructor deck</a:t>
+            </a:r>
+          </a:p>
+          <a:p>
+            <a:r>
+              <a:t>(original-materials/AWS-Instructor Presentations/…). Instructor-facing — screen it, don't distribute.</a:t>
+            </a:r>
+          </a:p>
+          <a:p>
+            <a:r>
+              <a:t>Preview it and cue it to this slide before class.</a:t>
+            </a:r>
+          </a:p>
+          <a:p/>
+          <a:p>
+            <a:r>
+              <a:t>WHAT TO DEMONSTRATE (follow the recorded demo, then map to our build):</a:t>
+            </a:r>
+          </a:p>
+          <a:p>
+            <a:r>
+              <a:t>1. Create a launch template and an Auto Scaling group with min / desired / max.</a:t>
+            </a:r>
+          </a:p>
+          <a:p>
+            <a:r>
+              <a:t>2. Attach a target-tracking scaling policy (keep average CPU near a target).</a:t>
+            </a:r>
+          </a:p>
+          <a:p>
+            <a:r>
+              <a:t>3. Watch the group launch and REGISTER instances with the load balancer.</a:t>
+            </a:r>
+          </a:p>
+          <a:p/>
+          <a:p>
+            <a:r>
+              <a:t>WHAT TO EMPHASISE:</a:t>
+            </a:r>
+          </a:p>
+          <a:p>
+            <a:r>
+              <a:t>• Ours: min 1 / desired 1 / max 2, target-tracking CPU 70%, 300 s cooldown — point to each field.</a:t>
+            </a:r>
+          </a:p>
+          <a:p>
+            <a:r>
+              <a:t>• The ALB target group + health checks — show instances registering and the health state flipping</a:t>
+            </a:r>
+          </a:p>
+          <a:p>
+            <a:r>
+              <a:t>  healthy; that's what "behind the ALB" means concretely.</a:t>
+            </a:r>
+          </a:p>
+          <a:p>
+            <a:r>
+              <a:t>• Foreshadow the TEST: driving CPU (or changing desired) makes it scale OUT then IN — students must</a:t>
+            </a:r>
+          </a:p>
+          <a:p>
+            <a:r>
+              <a:t>  OBSERVE and EVIDENCE this, not just build it (PC 3.2).</a:t>
+            </a:r>
+          </a:p>
+          <a:p/>
+          <a:p>
+            <a:r>
+              <a:t>PREP: Learner Lab open with the C1 instance already built (the ASG needs something to scale), the</a:t>
+            </a:r>
+          </a:p>
+          <a:p>
+            <a:r>
+              <a:t>supplied design handy, demo queued. ~8-10 min to screen + narrate before the activity.</a:t>
+            </a:r>
+          </a:p>
+        </p:txBody>
+      </p:sp>
+      <p:sp>
+        <p:nvSpPr>
+          <p:cNvPr id="4" name="Slide Number Placeholder 3"/>
+          <p:cNvSpPr>
+            <a:spLocks noGrp="1"/>
+          </p:cNvSpPr>
+          <p:nvPr>
+            <p:ph type="sldNum" idx="5" sz="quarter"/>
+          </p:nvPr>
+        </p:nvSpPr>
+        <p:spPr/>
+      </p:sp>
+    </p:spTree>
+  </p:cSld>
+  <p:clrMapOvr>
+    <a:masterClrMapping/>
+  </p:clrMapOvr>
+</p:notes>
+</file>
+
+<file path=ppt/notesSlides/notesSlide14.xml><?xml version="1.0" encoding="utf-8"?>
+<p:notes xmlns:a="http://schemas.openxmlformats.org/drawingml/2006/main" xmlns:p="http://schemas.openxmlformats.org/presentationml/2006/main" xmlns:r="http://schemas.openxmlformats.org/officeDocument/2006/relationships">
+  <p:cSld>
+    <p:spTree>
+      <p:nvGrpSpPr>
+        <p:cNvPr id="1" name=""/>
+        <p:cNvGrpSpPr/>
+        <p:nvPr/>
+      </p:nvGrpSpPr>
+      <p:grpSpPr>
+        <a:xfrm>
+          <a:off x="0" y="0"/>
+          <a:ext cx="0" cy="0"/>
+          <a:chOff x="0" y="0"/>
+          <a:chExt cx="0" cy="0"/>
+        </a:xfrm>
+      </p:grpSpPr>
+      <p:sp>
+        <p:nvSpPr>
+          <p:cNvPr id="2" name="Slide Image Placeholder 1"/>
+          <p:cNvSpPr>
+            <a:spLocks noGrp="1"/>
+          </p:cNvSpPr>
+          <p:nvPr>
+            <p:ph type="sldImg" idx="2"/>
+          </p:nvPr>
+        </p:nvSpPr>
+        <p:spPr/>
+      </p:sp>
+      <p:sp>
+        <p:nvSpPr>
+          <p:cNvPr id="3" name="Notes Placeholder 2"/>
+          <p:cNvSpPr>
+            <a:spLocks noGrp="1"/>
+          </p:cNvSpPr>
+          <p:nvPr>
+            <p:ph type="body" idx="3" sz="quarter"/>
+          </p:nvPr>
+        </p:nvSpPr>
+        <p:spPr/>
+        <p:txBody>
+          <a:bodyPr/>
+          <a:lstStyle/>
+          <a:p>
+            <a:r>
+              <a:t>Facilitation — the C2 build AND the mandatory scaling test. The test is PC evidence, not optional;</a:t>
+            </a:r>
+          </a:p>
+          <a:p>
+            <a:r>
+              <a:t>make that unmissable.</a:t>
+            </a:r>
+          </a:p>
+          <a:p>
+            <a:r>
+              <a:t>Tell students, in these words: "Per the supplied design, put the Ledgerline instance behind an</a:t>
+            </a:r>
+          </a:p>
+          <a:p>
+            <a:r>
+              <a:t>internal ALB in an Auto Scaling group — then TEST that it actually scales, and evidence the event."</a:t>
+            </a:r>
+          </a:p>
+          <a:p>
+            <a:r>
+              <a:t>Steps (put on the board):</a:t>
+            </a:r>
+          </a:p>
+          <a:p>
+            <a:r>
+              <a:t>1. Create the internal ALB + target group + HTTPS:443 listener.</a:t>
+            </a:r>
+          </a:p>
+          <a:p>
+            <a:r>
+              <a:t>2. Create the launch template + ASG (min 1 / max 2, target-tracking CPU 70%).</a:t>
+            </a:r>
+          </a:p>
+          <a:p>
+            <a:r>
+              <a:t>3. TEST scaling: drive the metric (or change desired capacity), watch it scale OUT then IN; fix any</a:t>
+            </a:r>
+          </a:p>
+          <a:p>
+            <a:r>
+              <a:t>   errors you hit.</a:t>
+            </a:r>
+          </a:p>
+          <a:p>
+            <a:r>
+              <a:t>4. Capture evidence — the ALB, target health, the ASG, and the scaling EVENT.</a:t>
+            </a:r>
+          </a:p>
+          <a:p>
+            <a:r>
+              <a:t>Must produce: a working ALB+ASG matching the design AND named evidence of a scaling event (before/</a:t>
+            </a:r>
+          </a:p>
+          <a:p>
+            <a:r>
+              <a:t>after capacity, the activity history), plus any errors fixed.</a:t>
+            </a:r>
+          </a:p>
+          <a:p>
+            <a:r>
+              <a:t>Timing: ~25 min. Where they get stuck: forgetting the test (they build and stop — push them to</a:t>
+            </a:r>
+          </a:p>
+          <a:p>
+            <a:r>
+              <a:t>trigger a scale event); target group showing unhealthy (usually the SG/port or health-check path);</a:t>
+            </a:r>
+          </a:p>
+          <a:p>
+            <a:r>
+              <a:t>confusing "desired" with a policy. Circulate on the test above all.</a:t>
+            </a:r>
+          </a:p>
+          <a:p>
+            <a:r>
+              <a:t>Share-back prompt: "Show me the moment it scaled — what triggered it and what did the ASG do?"</a:t>
+            </a:r>
+          </a:p>
+          <a:p>
+            <a:r>
+              <a:t>No-leakage note: Ledgerline is PRACTICE; AT2 assesses the same scaling build + test on the LMS —</a:t>
+            </a:r>
+          </a:p>
+          <a:p>
+            <a:r>
+              <a:t>comparable, not identical. PC 3.2 is tested here so it's rehearsed, not first-seen in assessment.</a:t>
+            </a:r>
+          </a:p>
+        </p:txBody>
+      </p:sp>
+      <p:sp>
+        <p:nvSpPr>
+          <p:cNvPr id="4" name="Slide Number Placeholder 3"/>
+          <p:cNvSpPr>
+            <a:spLocks noGrp="1"/>
+          </p:cNvSpPr>
+          <p:nvPr>
+            <p:ph type="sldNum" idx="5" sz="quarter"/>
+          </p:nvPr>
+        </p:nvSpPr>
+        <p:spPr/>
+      </p:sp>
+    </p:spTree>
+  </p:cSld>
+  <p:clrMapOvr>
+    <a:masterClrMapping/>
+  </p:clrMapOvr>
+</p:notes>
+</file>
+
+<file path=ppt/notesSlides/notesSlide2.xml><?xml version="1.0" encoding="utf-8"?>
+<p:notes xmlns:a="http://schemas.openxmlformats.org/drawingml/2006/main" xmlns:p="http://schemas.openxmlformats.org/presentationml/2006/main" xmlns:r="http://schemas.openxmlformats.org/officeDocument/2006/relationships">
+  <p:cSld>
+    <p:spTree>
+      <p:nvGrpSpPr>
+        <p:cNvPr id="1" name=""/>
+        <p:cNvGrpSpPr/>
+        <p:nvPr/>
+      </p:nvGrpSpPr>
+      <p:grpSpPr>
+        <a:xfrm>
+          <a:off x="0" y="0"/>
+          <a:ext cx="0" cy="0"/>
+          <a:chOff x="0" y="0"/>
+          <a:chExt cx="0" cy="0"/>
+        </a:xfrm>
+      </p:grpSpPr>
+      <p:sp>
+        <p:nvSpPr>
+          <p:cNvPr id="2" name="Slide Image Placeholder 1"/>
+          <p:cNvSpPr>
+            <a:spLocks noGrp="1"/>
+          </p:cNvSpPr>
+          <p:nvPr>
+            <p:ph type="sldImg" idx="2"/>
+          </p:nvPr>
+        </p:nvSpPr>
+        <p:spPr/>
+      </p:sp>
+      <p:sp>
+        <p:nvSpPr>
+          <p:cNvPr id="3" name="Notes Placeholder 2"/>
+          <p:cNvSpPr>
+            <a:spLocks noGrp="1"/>
+          </p:cNvSpPr>
+          <p:nvPr>
+            <p:ph type="body" idx="3" sz="quarter"/>
+          </p:nvPr>
+        </p:nvSpPr>
+        <p:spPr/>
+        <p:txBody>
+          <a:bodyPr/>
+          <a:lstStyle/>
+          <a:p>
+            <a:r>
+              <a:t>Vendor-neutral primer — no assumed baseline. Get the mental model of a server solid BEFORE EC2.</a:t>
+            </a:r>
+          </a:p>
+          <a:p>
+            <a:r>
+              <a:t>• Walk it plainly: a server is just a computer that runs your application for others to use.</a:t>
+            </a:r>
+          </a:p>
+          <a:p>
+            <a:r>
+              <a:t>• The four dimensions (make them concrete): CPU, memory (RAM), disk, network bandwidth — this is</a:t>
+            </a:r>
+          </a:p>
+          <a:p>
+            <a:r>
+              <a:t>  how you "size" a server, and it's exactly the KE 5 language they're assessed on.</a:t>
+            </a:r>
+          </a:p>
+          <a:p>
+            <a:r>
+              <a:t>• The shift (bolded): a virtual machine is a software-defined server — you RENT one and size it to</a:t>
+            </a:r>
+          </a:p>
+          <a:p>
+            <a:r>
+              <a:t>  the workload, instead of buying a physical box. Callback to Topic 1's "infrastructure as software".</a:t>
+            </a:r>
+          </a:p>
+          <a:p>
+            <a:r>
+              <a:t>Misconception to pre-empt: "virtual = less real / less powerful." No — a VM is a full server; it</a:t>
+            </a:r>
+          </a:p>
+          <a:p>
+            <a:r>
+              <a:t>just runs as software on shared hardware, and you can resize it in ways a physical box never allows.</a:t>
+            </a:r>
+          </a:p>
+          <a:p>
+            <a:r>
+              <a:t>Question to pose: "If you had to size a server for Ledgerline, what four things would you be</a:t>
+            </a:r>
+          </a:p>
+          <a:p>
+            <a:r>
+              <a:t>deciding?" (CPU / RAM / disk / network — the four dimensions).</a:t>
+            </a:r>
+          </a:p>
+          <a:p>
+            <a:r>
+              <a:t>UoC/AT2 tie: ICTCLD401 KE 5 (VM sizing) + KE 6 (virtual vs physical) — the primer under PC 2.3.</a:t>
+            </a:r>
+          </a:p>
+        </p:txBody>
+      </p:sp>
+      <p:sp>
+        <p:nvSpPr>
+          <p:cNvPr id="4" name="Slide Number Placeholder 3"/>
+          <p:cNvSpPr>
+            <a:spLocks noGrp="1"/>
+          </p:cNvSpPr>
+          <p:nvPr>
+            <p:ph type="sldNum" idx="5" sz="quarter"/>
+          </p:nvPr>
+        </p:nvSpPr>
+        <p:spPr/>
+      </p:sp>
+    </p:spTree>
+  </p:cSld>
+  <p:clrMapOvr>
+    <a:masterClrMapping/>
+  </p:clrMapOvr>
+</p:notes>
+</file>
+
+<file path=ppt/notesSlides/notesSlide3.xml><?xml version="1.0" encoding="utf-8"?>
+<p:notes xmlns:a="http://schemas.openxmlformats.org/drawingml/2006/main" xmlns:p="http://schemas.openxmlformats.org/presentationml/2006/main" xmlns:r="http://schemas.openxmlformats.org/officeDocument/2006/relationships">
+  <p:cSld>
+    <p:spTree>
+      <p:nvGrpSpPr>
+        <p:cNvPr id="1" name=""/>
+        <p:cNvGrpSpPr/>
+        <p:nvPr/>
+      </p:nvGrpSpPr>
+      <p:grpSpPr>
+        <a:xfrm>
+          <a:off x="0" y="0"/>
+          <a:ext cx="0" cy="0"/>
+          <a:chOff x="0" y="0"/>
+          <a:chExt cx="0" cy="0"/>
+        </a:xfrm>
+      </p:grpSpPr>
+      <p:sp>
+        <p:nvSpPr>
+          <p:cNvPr id="2" name="Slide Image Placeholder 1"/>
+          <p:cNvSpPr>
+            <a:spLocks noGrp="1"/>
+          </p:cNvSpPr>
+          <p:nvPr>
+            <p:ph type="sldImg" idx="2"/>
+          </p:nvPr>
+        </p:nvSpPr>
+        <p:spPr/>
+      </p:sp>
+      <p:sp>
+        <p:nvSpPr>
+          <p:cNvPr id="3" name="Notes Placeholder 2"/>
+          <p:cNvSpPr>
+            <a:spLocks noGrp="1"/>
+          </p:cNvSpPr>
+          <p:nvPr>
+            <p:ph type="body" idx="3" sz="quarter"/>
+          </p:nvPr>
+        </p:nvSpPr>
+        <p:spPr/>
+        <p:txBody>
+          <a:bodyPr/>
+          <a:lstStyle/>
+          <a:p>
+            <a:r>
+              <a:t>The AWS-context teach after the primer — put names to the concept. Keep it recognition-level; the</a:t>
+            </a:r>
+          </a:p>
+          <a:p>
+            <a:r>
+              <a:t>detail is the next slide.</a:t>
+            </a:r>
+          </a:p>
+          <a:p>
+            <a:r>
+              <a:t>• Walk the bullets: EC2 gives resizable virtual machines called INSTANCES; you get full control of</a:t>
+            </a:r>
+          </a:p>
+          <a:p>
+            <a:r>
+              <a:t>  the guest OS (Windows or Linux); you launch from an AMI into a subnet, ready in minutes.</a:t>
+            </a:r>
+          </a:p>
+          <a:p>
+            <a:r>
+              <a:t>• The accent line: security groups control traffic in and out — callback to Topic 7, where they</a:t>
+            </a:r>
+          </a:p>
+          <a:p>
+            <a:r>
+              <a:t>  built the SG shells the EC2 instance now fills.</a:t>
+            </a:r>
+          </a:p>
+          <a:p>
+            <a:r>
+              <a:t>• Tie to the model: EC2 is IaaS (Topic 1) — you run the OS and app, AWS runs the hardware.</a:t>
+            </a:r>
+          </a:p>
+          <a:p>
+            <a:r>
+              <a:t>Misconception to pre-empt: "an instance is a fixed size you're stuck with." No — you can stop it,</a:t>
+            </a:r>
+          </a:p>
+          <a:p>
+            <a:r>
+              <a:t>change the instance type, and start it bigger; resizable is the point.</a:t>
+            </a:r>
+          </a:p>
+          <a:p>
+            <a:r>
+              <a:t>Question to pose: "EC2 is IaaS — so after AWS hands you the instance, whose job is the operating</a:t>
+            </a:r>
+          </a:p>
+          <a:p>
+            <a:r>
+              <a:t>system and patching?" (yours — the trade-off for full control).</a:t>
+            </a:r>
+          </a:p>
+          <a:p>
+            <a:r>
+              <a:t>UoC/AT2 tie: ICTCLD401 PC 2.3 (create the VM to requirements); the SG link back to PC 2.6.</a:t>
+            </a:r>
+          </a:p>
+        </p:txBody>
+      </p:sp>
+      <p:sp>
+        <p:nvSpPr>
+          <p:cNvPr id="4" name="Slide Number Placeholder 3"/>
+          <p:cNvSpPr>
+            <a:spLocks noGrp="1"/>
+          </p:cNvSpPr>
+          <p:nvPr>
+            <p:ph type="sldNum" idx="5" sz="quarter"/>
+          </p:nvPr>
+        </p:nvSpPr>
+        <p:spPr/>
+      </p:sp>
+    </p:spTree>
+  </p:cSld>
+  <p:clrMapOvr>
+    <a:masterClrMapping/>
+  </p:clrMapOvr>
+</p:notes>
+</file>
+
+<file path=ppt/notesSlides/notesSlide4.xml><?xml version="1.0" encoding="utf-8"?>
+<p:notes xmlns:a="http://schemas.openxmlformats.org/drawingml/2006/main" xmlns:p="http://schemas.openxmlformats.org/presentationml/2006/main" xmlns:r="http://schemas.openxmlformats.org/officeDocument/2006/relationships">
+  <p:cSld>
+    <p:spTree>
+      <p:nvGrpSpPr>
+        <p:cNvPr id="1" name=""/>
+        <p:cNvGrpSpPr/>
+        <p:nvPr/>
+      </p:nvGrpSpPr>
+      <p:grpSpPr>
+        <a:xfrm>
+          <a:off x="0" y="0"/>
+          <a:ext cx="0" cy="0"/>
+          <a:chOff x="0" y="0"/>
+          <a:chExt cx="0" cy="0"/>
+        </a:xfrm>
+      </p:grpSpPr>
+      <p:sp>
+        <p:nvSpPr>
+          <p:cNvPr id="2" name="Slide Image Placeholder 1"/>
+          <p:cNvSpPr>
+            <a:spLocks noGrp="1"/>
+          </p:cNvSpPr>
+          <p:nvPr>
+            <p:ph type="sldImg" idx="2"/>
+          </p:nvPr>
+        </p:nvSpPr>
+        <p:spPr/>
+      </p:sp>
+      <p:sp>
+        <p:nvSpPr>
+          <p:cNvPr id="3" name="Notes Placeholder 2"/>
+          <p:cNvSpPr>
+            <a:spLocks noGrp="1"/>
+          </p:cNvSpPr>
+          <p:nvPr>
+            <p:ph type="body" idx="3" sz="quarter"/>
+          </p:nvPr>
+        </p:nvSpPr>
+        <p:spPr/>
+        <p:txBody>
+          <a:bodyPr/>
+          <a:lstStyle/>
+          <a:p>
+            <a:r>
+              <a:t>The workhorse teach for C1 — the launch-wizard decisions, so the demo and activity aren't a blur of</a:t>
+            </a:r>
+          </a:p>
+          <a:p>
+            <a:r>
+              <a:t>unfamiliar fields. Don't read the list; explain what each choice DOES.</a:t>
+            </a:r>
+          </a:p>
+          <a:p>
+            <a:r>
+              <a:t>• AMI = the template (OS + pre-installed software). Instance type = family.generation.size (e.g.</a:t>
+            </a:r>
+          </a:p>
+          <a:p>
+            <a:r>
+              <a:t>  m6i.large) — this is where the four sizing dimensions become a concrete pick.</a:t>
+            </a:r>
+          </a:p>
+          <a:p>
+            <a:r>
+              <a:t>• Network = which VPC/subnet it lands in; IAM role = an instance profile so the app calls AWS</a:t>
+            </a:r>
+          </a:p>
+          <a:p>
+            <a:r>
+              <a:t>  services with NO stored keys (callback to the Topic 6 role they built).</a:t>
+            </a:r>
+          </a:p>
+          <a:p>
+            <a:r>
+              <a:t>• User data = a first-boot script; storage = root + data volumes; plus tags, security group, key pair.</a:t>
+            </a:r>
+          </a:p>
+          <a:p>
+            <a:r>
+              <a:t>Misconception to pre-empt: "the instance type is just 'how fast'." It sets CPU, RAM, storage AND</a:t>
+            </a:r>
+          </a:p>
+          <a:p>
+            <a:r>
+              <a:t>network together — under-size any one and the app suffers; it's a balanced choice, not a speed dial.</a:t>
+            </a:r>
+          </a:p>
+          <a:p>
+            <a:r>
+              <a:t>Question to pose: "Why give the instance an IAM ROLE instead of putting an access key on the box?"</a:t>
+            </a:r>
+          </a:p>
+          <a:p>
+            <a:r>
+              <a:t>(no long-lived credentials to leak — the payoff of the Topic 6 IAM teaching).</a:t>
+            </a:r>
+          </a:p>
+          <a:p>
+            <a:r>
+              <a:t>UoC/AT2 tie: ICTCLD401 PC 2.3; the launch choices are exactly what the §4.5 Compute evidence shows.</a:t>
+            </a:r>
+          </a:p>
+        </p:txBody>
+      </p:sp>
+      <p:sp>
+        <p:nvSpPr>
+          <p:cNvPr id="4" name="Slide Number Placeholder 3"/>
+          <p:cNvSpPr>
+            <a:spLocks noGrp="1"/>
+          </p:cNvSpPr>
+          <p:nvPr>
+            <p:ph type="sldNum" idx="5" sz="quarter"/>
+          </p:nvPr>
+        </p:nvSpPr>
+        <p:spPr/>
+      </p:sp>
+    </p:spTree>
+  </p:cSld>
+  <p:clrMapOvr>
+    <a:masterClrMapping/>
+  </p:clrMapOvr>
+</p:notes>
+</file>
+
+<file path=ppt/notesSlides/notesSlide5.xml><?xml version="1.0" encoding="utf-8"?>
+<p:notes xmlns:a="http://schemas.openxmlformats.org/drawingml/2006/main" xmlns:p="http://schemas.openxmlformats.org/presentationml/2006/main" xmlns:r="http://schemas.openxmlformats.org/officeDocument/2006/relationships">
+  <p:cSld>
+    <p:spTree>
+      <p:nvGrpSpPr>
+        <p:cNvPr id="1" name=""/>
+        <p:cNvGrpSpPr/>
+        <p:nvPr/>
+      </p:nvGrpSpPr>
+      <p:grpSpPr>
+        <a:xfrm>
+          <a:off x="0" y="0"/>
+          <a:ext cx="0" cy="0"/>
+          <a:chOff x="0" y="0"/>
+          <a:chExt cx="0" cy="0"/>
+        </a:xfrm>
+      </p:grpSpPr>
+      <p:sp>
+        <p:nvSpPr>
+          <p:cNvPr id="2" name="Slide Image Placeholder 1"/>
+          <p:cNvSpPr>
+            <a:spLocks noGrp="1"/>
+          </p:cNvSpPr>
+          <p:nvPr>
+            <p:ph type="sldImg" idx="2"/>
+          </p:nvPr>
+        </p:nvSpPr>
+        <p:spPr/>
+      </p:sp>
+      <p:sp>
+        <p:nvSpPr>
+          <p:cNvPr id="3" name="Notes Placeholder 2"/>
+          <p:cNvSpPr>
+            <a:spLocks noGrp="1"/>
+          </p:cNvSpPr>
+          <p:nvPr>
+            <p:ph type="body" idx="3" sz="quarter"/>
+          </p:nvPr>
+        </p:nvSpPr>
+        <p:spPr/>
+        <p:txBody>
+          <a:bodyPr/>
+          <a:lstStyle/>
+          <a:p>
+            <a:r>
+              <a:t>Primer + AWS teach for the disk on the server — and the first half of the examinable block-vs-object</a:t>
+            </a:r>
+          </a:p>
+          <a:p>
+            <a:r>
+              <a:t>distinction (object storage / S3 is 8b).</a:t>
+            </a:r>
+          </a:p>
+          <a:p>
+            <a:r>
+              <a:t>• Primer: block storage = a virtual disk attached to ONE instance, just like a drive inside a PC.</a:t>
+            </a:r>
+          </a:p>
+          <a:p>
+            <a:r>
+              <a:t>• The accent line: Amazon EBS is DURABLE block storage — stop/start the instance and the data</a:t>
+            </a:r>
+          </a:p>
+          <a:p>
+            <a:r>
+              <a:t>  survives. Contrast hard with instance store (ephemeral, lost on stop) — bracketed on purpose.</a:t>
+            </a:r>
+          </a:p>
+          <a:p>
+            <a:r>
+              <a:t>• gp3 SSD volumes; you can resize or change type WITHOUT downtime — reinforce "infrastructure as</a:t>
+            </a:r>
+          </a:p>
+          <a:p>
+            <a:r>
+              <a:t>  software": the disk is elastic too.</a:t>
+            </a:r>
+          </a:p>
+          <a:p>
+            <a:r>
+              <a:t>Misconception to pre-empt: "EBS is like S3 / a shared drive." No — EBS attaches to a single instance</a:t>
+            </a:r>
+          </a:p>
+          <a:p>
+            <a:r>
+              <a:t>as a block disk; it is not object storage and not shared. This block-vs-object line is the whole</a:t>
+            </a:r>
+          </a:p>
+          <a:p>
+            <a:r>
+              <a:t>point, and it returns in 8b.</a:t>
+            </a:r>
+          </a:p>
+          <a:p>
+            <a:r>
+              <a:t>Question to pose: "If you store the app's working data on INSTANCE STORE and the instance stops,</a:t>
+            </a:r>
+          </a:p>
+          <a:p>
+            <a:r>
+              <a:t>what happens?" (it's gone — that's why the design uses EBS).</a:t>
+            </a:r>
+          </a:p>
+          <a:p>
+            <a:r>
+              <a:t>UoC/AT2 tie: ICTCLD401 PC 2.4 (define/add/expand storage on the VM) + KE 6 storage options (block).</a:t>
+            </a:r>
+          </a:p>
+        </p:txBody>
+      </p:sp>
+      <p:sp>
+        <p:nvSpPr>
+          <p:cNvPr id="4" name="Slide Number Placeholder 3"/>
+          <p:cNvSpPr>
+            <a:spLocks noGrp="1"/>
+          </p:cNvSpPr>
+          <p:nvPr>
+            <p:ph type="sldNum" idx="5" sz="quarter"/>
+          </p:nvPr>
+        </p:nvSpPr>
+        <p:spPr/>
+      </p:sp>
+    </p:spTree>
+  </p:cSld>
+  <p:clrMapOvr>
+    <a:masterClrMapping/>
+  </p:clrMapOvr>
+</p:notes>
+</file>
+
+<file path=ppt/notesSlides/notesSlide6.xml><?xml version="1.0" encoding="utf-8"?>
+<p:notes xmlns:a="http://schemas.openxmlformats.org/drawingml/2006/main" xmlns:p="http://schemas.openxmlformats.org/presentationml/2006/main" xmlns:r="http://schemas.openxmlformats.org/officeDocument/2006/relationships">
+  <p:cSld>
+    <p:spTree>
+      <p:nvGrpSpPr>
+        <p:cNvPr id="1" name=""/>
+        <p:cNvGrpSpPr/>
+        <p:nvPr/>
+      </p:nvGrpSpPr>
+      <p:grpSpPr>
+        <a:xfrm>
+          <a:off x="0" y="0"/>
+          <a:ext cx="0" cy="0"/>
+          <a:chOff x="0" y="0"/>
+          <a:chExt cx="0" cy="0"/>
+        </a:xfrm>
+      </p:grpSpPr>
+      <p:sp>
+        <p:nvSpPr>
+          <p:cNvPr id="2" name="Slide Image Placeholder 1"/>
+          <p:cNvSpPr>
+            <a:spLocks noGrp="1"/>
+          </p:cNvSpPr>
+          <p:nvPr>
+            <p:ph type="sldImg" idx="2"/>
+          </p:nvPr>
+        </p:nvSpPr>
+        <p:spPr/>
+      </p:sp>
+      <p:sp>
+        <p:nvSpPr>
+          <p:cNvPr id="3" name="Notes Placeholder 2"/>
+          <p:cNvSpPr>
+            <a:spLocks noGrp="1"/>
+          </p:cNvSpPr>
+          <p:nvPr>
+            <p:ph type="body" idx="3" sz="quarter"/>
+          </p:nvPr>
+        </p:nvSpPr>
+        <p:spPr/>
+        <p:txBody>
+          <a:bodyPr/>
+          <a:lstStyle/>
+          <a:p>
+            <a:r>
+              <a:t>Pivot from generic teaching to THIS design — read the supplied spec so the activity is unambiguous.</a:t>
+            </a:r>
+          </a:p>
+          <a:p>
+            <a:r>
+              <a:t>Everything here is specified; the *-marked items are already-made implementer decisions, not open</a:t>
+            </a:r>
+          </a:p>
+          <a:p>
+            <a:r>
+              <a:t>questions.</a:t>
+            </a:r>
+          </a:p>
+          <a:p>
+            <a:r>
+              <a:t>• Walk it: EC2 Windows Server 2016 (m6i.large*), in private-app-a, NO public IP — a private app</a:t>
+            </a:r>
+          </a:p>
+          <a:p>
+            <a:r>
+              <a:t>  server reached through the network, not the internet.</a:t>
+            </a:r>
+          </a:p>
+          <a:p>
+            <a:r>
+              <a:t>• An instance role grants access to RDS, S3 and CloudWatch — no stored keys (callback again).</a:t>
+            </a:r>
+          </a:p>
+          <a:p>
+            <a:r>
+              <a:t>• EBS: gp3 root 80 GB + a gp3 data volume sized for footprint + 12-month growth + headroom; attach</a:t>
+            </a:r>
+          </a:p>
+          <a:p>
+            <a:r>
+              <a:t>  sg-app; tag per the naming standard.</a:t>
+            </a:r>
+          </a:p>
+          <a:p>
+            <a:r>
+              <a:t>Misconception to pre-empt: "no public IP must be a mistake — how do users reach it?" No — it's private</a:t>
+            </a:r>
+          </a:p>
+          <a:p>
+            <a:r>
+              <a:t>by design; access comes via the ALB/network, and staff over the VPN. Private-by-default is correct.</a:t>
+            </a:r>
+          </a:p>
+          <a:p>
+            <a:r>
+              <a:t>Question to pose: "Why does the app server sit in private-app-a with no public IP?" (defence in</a:t>
+            </a:r>
+          </a:p>
+          <a:p>
+            <a:r>
+              <a:t>depth — nothing is exposed to the internet that doesn't need to be).</a:t>
+            </a:r>
+          </a:p>
+          <a:p>
+            <a:r>
+              <a:t>UoC/AT2 tie: ICTCLD401 PC 2.3 + PC 2.4; this is the §4.5 Compute build, evidenced in Appendix A/B.</a:t>
+            </a:r>
+          </a:p>
+        </p:txBody>
+      </p:sp>
+      <p:sp>
+        <p:nvSpPr>
+          <p:cNvPr id="4" name="Slide Number Placeholder 3"/>
+          <p:cNvSpPr>
+            <a:spLocks noGrp="1"/>
+          </p:cNvSpPr>
+          <p:nvPr>
+            <p:ph type="sldNum" idx="5" sz="quarter"/>
+          </p:nvPr>
+        </p:nvSpPr>
+        <p:spPr/>
+      </p:sp>
+    </p:spTree>
+  </p:cSld>
+  <p:clrMapOvr>
+    <a:masterClrMapping/>
+  </p:clrMapOvr>
+</p:notes>
+</file>
+
+<file path=ppt/notesSlides/notesSlide7.xml><?xml version="1.0" encoding="utf-8"?>
+<p:notes xmlns:a="http://schemas.openxmlformats.org/drawingml/2006/main" xmlns:p="http://schemas.openxmlformats.org/presentationml/2006/main" xmlns:r="http://schemas.openxmlformats.org/officeDocument/2006/relationships">
+  <p:cSld>
+    <p:spTree>
+      <p:nvGrpSpPr>
+        <p:cNvPr id="1" name=""/>
+        <p:cNvGrpSpPr/>
+        <p:nvPr/>
+      </p:nvGrpSpPr>
+      <p:grpSpPr>
+        <a:xfrm>
+          <a:off x="0" y="0"/>
+          <a:ext cx="0" cy="0"/>
+          <a:chOff x="0" y="0"/>
+          <a:chExt cx="0" cy="0"/>
+        </a:xfrm>
+      </p:grpSpPr>
+      <p:sp>
+        <p:nvSpPr>
+          <p:cNvPr id="2" name="Slide Image Placeholder 1"/>
+          <p:cNvSpPr>
+            <a:spLocks noGrp="1"/>
+          </p:cNvSpPr>
+          <p:nvPr>
+            <p:ph type="sldImg" idx="2"/>
+          </p:nvPr>
+        </p:nvSpPr>
+        <p:spPr/>
+      </p:sp>
+      <p:sp>
+        <p:nvSpPr>
+          <p:cNvPr id="3" name="Notes Placeholder 2"/>
+          <p:cNvSpPr>
+            <a:spLocks noGrp="1"/>
+          </p:cNvSpPr>
+          <p:nvPr>
+            <p:ph type="body" idx="3" sz="quarter"/>
+          </p:nvPr>
+        </p:nvSpPr>
+        <p:spPr/>
+        <p:txBody>
+          <a:bodyPr/>
+          <a:lstStyle/>
+          <a:p>
+            <a:r>
+              <a:t>DEMONSTRATION slide (recorded demo). Screen it, then relate each step to OUR supplied design before</a:t>
+            </a:r>
+          </a:p>
+          <a:p>
+            <a:r>
+              <a:t>the students do it themselves — teach -&gt; DEMONSTRATE -&gt; practice.</a:t>
+            </a:r>
+          </a:p>
+          <a:p/>
+          <a:p>
+            <a:r>
+              <a:t>WHERE TO FIND THE RECORDED DEMO: AWS Academy Cloud Foundations → Module 06 (Compute) → slide 35,</a:t>
+            </a:r>
+          </a:p>
+          <a:p>
+            <a:r>
+              <a:t>"Recorded Amazon EC2 demonstration", inside the ACF M06 instructor deck (original-materials/</a:t>
+            </a:r>
+          </a:p>
+          <a:p>
+            <a:r>
+              <a:t>AWS-Instructor Presentations/…). Instructor-facing — screen it in class, don't distribute to</a:t>
+            </a:r>
+          </a:p>
+          <a:p>
+            <a:r>
+              <a:t>students. Preview it and cue it to this slide before class.</a:t>
+            </a:r>
+          </a:p>
+          <a:p/>
+          <a:p>
+            <a:r>
+              <a:t>WHAT TO DEMONSTRATE (follow the recorded demo, then map each step to our build):</a:t>
+            </a:r>
+          </a:p>
+          <a:p>
+            <a:r>
+              <a:t>1. Launch Instance Wizard — choose the AMI and instance type.</a:t>
+            </a:r>
+          </a:p>
+          <a:p>
+            <a:r>
+              <a:t>2. Set the network (VPC/subnet), IAM role, storage volumes, tags and security group.</a:t>
+            </a:r>
+          </a:p>
+          <a:p>
+            <a:r>
+              <a:t>3. Launch, then view the instance, its volumes and monitoring.</a:t>
+            </a:r>
+          </a:p>
+          <a:p>
+            <a:r>
+              <a:t>4. Resize the instance type / root volume to show how it changes.</a:t>
+            </a:r>
+          </a:p>
+          <a:p/>
+          <a:p>
+            <a:r>
+              <a:t>WHAT TO EMPHASISE:</a:t>
+            </a:r>
+          </a:p>
+          <a:p>
+            <a:r>
+              <a:t>• Ours is Windows Server 2016 into private-app-a with NO public IP — point out where in the wizard</a:t>
+            </a:r>
+          </a:p>
+          <a:p>
+            <a:r>
+              <a:t>  that's set (subnet + auto-assign public IP off).</a:t>
+            </a:r>
+          </a:p>
+          <a:p>
+            <a:r>
+              <a:t>• The instance ROLE, not an access key — show the "IAM instance profile" field explicitly.</a:t>
+            </a:r>
+          </a:p>
+          <a:p>
+            <a:r>
+              <a:t>• Add the gp3 DATA volume as well as the root — students forget the second volume.</a:t>
+            </a:r>
+          </a:p>
+          <a:p>
+            <a:r>
+              <a:t>• Narrate the evidence capture — the instance, its volumes, the Region — model it as you go.</a:t>
+            </a:r>
+          </a:p>
+          <a:p/>
+          <a:p>
+            <a:r>
+              <a:t>PREP: clean Learner Lab open, the supplied design handy (instance type, subnet, tags), demo queued.</a:t>
+            </a:r>
+          </a:p>
+          <a:p>
+            <a:r>
+              <a:t>~8-10 min to screen + narrate before the activity. (Learner Lab deploys to us-east-1 — the design's</a:t>
+            </a:r>
+          </a:p>
+          <a:p>
+            <a:r>
+              <a:t>Region is simulated; don't let the Region field derail them.)</a:t>
+            </a:r>
+          </a:p>
+        </p:txBody>
+      </p:sp>
+      <p:sp>
+        <p:nvSpPr>
+          <p:cNvPr id="4" name="Slide Number Placeholder 3"/>
+          <p:cNvSpPr>
+            <a:spLocks noGrp="1"/>
+          </p:cNvSpPr>
+          <p:nvPr>
+            <p:ph type="sldNum" idx="5" sz="quarter"/>
+          </p:nvPr>
+        </p:nvSpPr>
+        <p:spPr/>
+      </p:sp>
+    </p:spTree>
+  </p:cSld>
+  <p:clrMapOvr>
+    <a:masterClrMapping/>
+  </p:clrMapOvr>
+</p:notes>
+</file>
+
+<file path=ppt/notesSlides/notesSlide8.xml><?xml version="1.0" encoding="utf-8"?>
+<p:notes xmlns:a="http://schemas.openxmlformats.org/drawingml/2006/main" xmlns:p="http://schemas.openxmlformats.org/presentationml/2006/main" xmlns:r="http://schemas.openxmlformats.org/officeDocument/2006/relationships">
+  <p:cSld>
+    <p:spTree>
+      <p:nvGrpSpPr>
+        <p:cNvPr id="1" name=""/>
+        <p:cNvGrpSpPr/>
+        <p:nvPr/>
+      </p:nvGrpSpPr>
+      <p:grpSpPr>
+        <a:xfrm>
+          <a:off x="0" y="0"/>
+          <a:ext cx="0" cy="0"/>
+          <a:chOff x="0" y="0"/>
+          <a:chExt cx="0" cy="0"/>
+        </a:xfrm>
+      </p:grpSpPr>
+      <p:sp>
+        <p:nvSpPr>
+          <p:cNvPr id="2" name="Slide Image Placeholder 1"/>
+          <p:cNvSpPr>
+            <a:spLocks noGrp="1"/>
+          </p:cNvSpPr>
+          <p:nvPr>
+            <p:ph type="sldImg" idx="2"/>
+          </p:nvPr>
+        </p:nvSpPr>
+        <p:spPr/>
+      </p:sp>
+      <p:sp>
+        <p:nvSpPr>
+          <p:cNvPr id="3" name="Notes Placeholder 2"/>
+          <p:cNvSpPr>
+            <a:spLocks noGrp="1"/>
+          </p:cNvSpPr>
+          <p:nvPr>
+            <p:ph type="body" idx="3" sz="quarter"/>
+          </p:nvPr>
+        </p:nvSpPr>
+        <p:spPr/>
+        <p:txBody>
+          <a:bodyPr/>
+          <a:lstStyle/>
+          <a:p>
+            <a:r>
+              <a:t>Facilitation — the C1 hands-on build on the PRACTICE engagement. They build; you circulate.</a:t>
+            </a:r>
+          </a:p>
+          <a:p>
+            <a:r>
+              <a:t>Tell students, in these words: "Open the lab and the supplied Solution Design. Launch the Ledgerline</a:t>
+            </a:r>
+          </a:p>
+          <a:p>
+            <a:r>
+              <a:t>application server exactly to the design — no improvising — and capture named evidence as you go."</a:t>
+            </a:r>
+          </a:p>
+          <a:p>
+            <a:r>
+              <a:t>Steps (put on the board):</a:t>
+            </a:r>
+          </a:p>
+          <a:p>
+            <a:r>
+              <a:t>1. Launch from AMI Windows Server 2016; instance type per the design.</a:t>
+            </a:r>
+          </a:p>
+          <a:p>
+            <a:r>
+              <a:t>2. Into private-app-a, with NO public IP.</a:t>
+            </a:r>
+          </a:p>
+          <a:p>
+            <a:r>
+              <a:t>3. Attach the instance role + sg-app; add the gp3 data volume; tag it per the naming standard.</a:t>
+            </a:r>
+          </a:p>
+          <a:p>
+            <a:r>
+              <a:t>4. Capture evidence — the instance, its volumes, the Region.</a:t>
+            </a:r>
+          </a:p>
+          <a:p>
+            <a:r>
+              <a:t>Must produce: a running EC2 instance matching the design + named evidence screenshots (instance,</a:t>
+            </a:r>
+          </a:p>
+          <a:p>
+            <a:r>
+              <a:t>volumes, Region) in their evidence log.</a:t>
+            </a:r>
+          </a:p>
+          <a:p>
+            <a:r>
+              <a:t>Timing: ~25 min. Where they get stuck: forgetting to turn OFF auto-assign public IP (they land in</a:t>
+            </a:r>
+          </a:p>
+          <a:p>
+            <a:r>
+              <a:t>the wrong subnet or public); missing the second (data) volume; skipping tags. Circulate on these three.</a:t>
+            </a:r>
+          </a:p>
+          <a:p>
+            <a:r>
+              <a:t>Share-back prompt: "Show me your evidence for the data volume — how do we know it's attached?"</a:t>
+            </a:r>
+          </a:p>
+          <a:p>
+            <a:r>
+              <a:t>No-leakage note: Ledgerline is the PRACTICE client; AT2 assesses the SAME build on the LMS system —</a:t>
+            </a:r>
+          </a:p>
+          <a:p>
+            <a:r>
+              <a:t>comparable, not identical. Keep them anchored to the supplied design here.</a:t>
+            </a:r>
+          </a:p>
+        </p:txBody>
+      </p:sp>
+      <p:sp>
+        <p:nvSpPr>
+          <p:cNvPr id="4" name="Slide Number Placeholder 3"/>
+          <p:cNvSpPr>
+            <a:spLocks noGrp="1"/>
+          </p:cNvSpPr>
+          <p:nvPr>
+            <p:ph type="sldNum" idx="5" sz="quarter"/>
+          </p:nvPr>
+        </p:nvSpPr>
+        <p:spPr/>
+      </p:sp>
+    </p:spTree>
+  </p:cSld>
+  <p:clrMapOvr>
+    <a:masterClrMapping/>
+  </p:clrMapOvr>
+</p:notes>
+</file>
+
+<file path=ppt/notesSlides/notesSlide9.xml><?xml version="1.0" encoding="utf-8"?>
+<p:notes xmlns:a="http://schemas.openxmlformats.org/drawingml/2006/main" xmlns:p="http://schemas.openxmlformats.org/presentationml/2006/main" xmlns:r="http://schemas.openxmlformats.org/officeDocument/2006/relationships">
+  <p:cSld>
+    <p:spTree>
+      <p:nvGrpSpPr>
+        <p:cNvPr id="1" name=""/>
+        <p:cNvGrpSpPr/>
+        <p:nvPr/>
+      </p:nvGrpSpPr>
+      <p:grpSpPr>
+        <a:xfrm>
+          <a:off x="0" y="0"/>
+          <a:ext cx="0" cy="0"/>
+          <a:chOff x="0" y="0"/>
+          <a:chExt cx="0" cy="0"/>
+        </a:xfrm>
+      </p:grpSpPr>
+      <p:sp>
+        <p:nvSpPr>
+          <p:cNvPr id="2" name="Slide Image Placeholder 1"/>
+          <p:cNvSpPr>
+            <a:spLocks noGrp="1"/>
+          </p:cNvSpPr>
+          <p:nvPr>
+            <p:ph type="sldImg" idx="2"/>
+          </p:nvPr>
+        </p:nvSpPr>
+        <p:spPr/>
+      </p:sp>
+      <p:sp>
+        <p:nvSpPr>
+          <p:cNvPr id="3" name="Notes Placeholder 2"/>
+          <p:cNvSpPr>
+            <a:spLocks noGrp="1"/>
+          </p:cNvSpPr>
+          <p:nvPr>
+            <p:ph type="body" idx="3" sz="quarter"/>
+          </p:nvPr>
+        </p:nvSpPr>
+        <p:spPr/>
+        <p:txBody>
+          <a:bodyPr/>
+          <a:lstStyle/>
+          <a:p>
+            <a:r>
+              <a:t>Open Section 2 with the vendor-neutral primer — the two ideas C2 turns on, before any AWS names.</a:t>
+            </a:r>
+          </a:p>
+          <a:p>
+            <a:r>
+              <a:t>• A load balancer spreads incoming traffic across several instances and checks their health.</a:t>
+            </a:r>
+          </a:p>
+          <a:p>
+            <a:r>
+              <a:t>• Elasticity = the infrastructure grows and shrinks as demand changes — the cloud advantage over a</a:t>
+            </a:r>
+          </a:p>
+          <a:p>
+            <a:r>
+              <a:t>  fixed on-prem box (callback to Topic 1's over-provisioning pain).</a:t>
+            </a:r>
+          </a:p>
+          <a:p>
+            <a:r>
+              <a:t>• The accent line: vertical scaling = replace with a bigger instance; horizontal = add MORE</a:t>
+            </a:r>
+          </a:p>
+          <a:p>
+            <a:r>
+              <a:t>  instances. Make the distinction crisp — it's examinable and students blur it.</a:t>
+            </a:r>
+          </a:p>
+          <a:p>
+            <a:r>
+              <a:t>• Last bullet: horizontal is the cloud way, and the basis of high availability LATER (AT3).</a:t>
+            </a:r>
+          </a:p>
+          <a:p>
+            <a:r>
+              <a:t>Misconception to pre-empt: "scaling means making the server bigger." That's only vertical; the cloud</a:t>
+            </a:r>
+          </a:p>
+          <a:p>
+            <a:r>
+              <a:t>pattern is horizontal — many small instances behind a balancer, added/removed automatically.</a:t>
+            </a:r>
+          </a:p>
+          <a:p>
+            <a:r>
+              <a:t>Question to pose: "Ledgerline gets a month-end spike — do you buy a bigger server, or add more of</a:t>
+            </a:r>
+          </a:p>
+          <a:p>
+            <a:r>
+              <a:t>the same for a few days? Which is cheaper and safer?" (horizontal — pay only for the spike).</a:t>
+            </a:r>
+          </a:p>
+          <a:p>
+            <a:r>
+              <a:t>UoC/AT2 tie: ICTCLD401 KE 5/6 (load balancing; vertical vs horizontal) — the primer under PC 3.1.</a:t>
+            </a:r>
+          </a:p>
+        </p:txBody>
+      </p:sp>
+      <p:sp>
+        <p:nvSpPr>
+          <p:cNvPr id="4" name="Slide Number Placeholder 3"/>
+          <p:cNvSpPr>
+            <a:spLocks noGrp="1"/>
+          </p:cNvSpPr>
+          <p:nvPr>
+            <p:ph type="sldNum" idx="5" sz="quarter"/>
+          </p:nvPr>
+        </p:nvSpPr>
+        <p:spPr/>
+      </p:sp>
+    </p:spTree>
+  </p:cSld>
+  <p:clrMapOvr>
+    <a:masterClrMapping/>
+  </p:clrMapOvr>
+</p:notes>
 </file>
 
 <file path=ppt/slideLayouts/slideLayout1.xml><?xml version="1.0" encoding="utf-8"?>
@@ -12624,4 +14877,324 @@
   </a:objectDefaults>
   <a:extraClrSchemeLst/>
 </a:theme>
+</file>
+
+<file path=ppt/theme/theme2.xml><?xml version="1.0" encoding="utf-8"?>
+<a:theme xmlns:a="http://schemas.openxmlformats.org/drawingml/2006/main" name="Office Theme">
+  <a:themeElements>
+    <a:clrScheme name="Office">
+      <a:dk1>
+        <a:sysClr val="windowText" lastClr="000000"/>
+      </a:dk1>
+      <a:lt1>
+        <a:sysClr val="window" lastClr="FFFFFF"/>
+      </a:lt1>
+      <a:dk2>
+        <a:srgbClr val="1F497D"/>
+      </a:dk2>
+      <a:lt2>
+        <a:srgbClr val="EEECE1"/>
+      </a:lt2>
+      <a:accent1>
+        <a:srgbClr val="4F81BD"/>
+      </a:accent1>
+      <a:accent2>
+        <a:srgbClr val="C0504D"/>
+      </a:accent2>
+      <a:accent3>
+        <a:srgbClr val="9BBB59"/>
+      </a:accent3>
+      <a:accent4>
+        <a:srgbClr val="8064A2"/>
+      </a:accent4>
+      <a:accent5>
+        <a:srgbClr val="4BACC6"/>
+      </a:accent5>
+      <a:accent6>
+        <a:srgbClr val="F79646"/>
+      </a:accent6>
+      <a:hlink>
+        <a:srgbClr val="0000FF"/>
+      </a:hlink>
+      <a:folHlink>
+        <a:srgbClr val="800080"/>
+      </a:folHlink>
+    </a:clrScheme>
+    <a:fontScheme name="Office">
+      <a:majorFont>
+        <a:latin typeface="Calibri"/>
+        <a:ea typeface=""/>
+        <a:cs typeface=""/>
+        <a:font script="Jpan" typeface="ＭＳ Ｐゴシック"/>
+        <a:font script="Hang" typeface="맑은 고딕"/>
+        <a:font script="Hans" typeface="宋体"/>
+        <a:font script="Hant" typeface="新細明體"/>
+        <a:font script="Arab" typeface="Times New Roman"/>
+        <a:font script="Hebr" typeface="Times New Roman"/>
+        <a:font script="Thai" typeface="Angsana New"/>
+        <a:font script="Ethi" typeface="Nyala"/>
+        <a:font script="Beng" typeface="Vrinda"/>
+        <a:font script="Gujr" typeface="Shruti"/>
+        <a:font script="Khmr" typeface="MoolBoran"/>
+        <a:font script="Knda" typeface="Tunga"/>
+        <a:font script="Guru" typeface="Raavi"/>
+        <a:font script="Cans" typeface="Euphemia"/>
+        <a:font script="Cher" typeface="Plantagenet Cherokee"/>
+        <a:font script="Yiii" typeface="Microsoft Yi Baiti"/>
+        <a:font script="Tibt" typeface="Microsoft Himalaya"/>
+        <a:font script="Thaa" typeface="MV Boli"/>
+        <a:font script="Deva" typeface="Mangal"/>
+        <a:font script="Telu" typeface="Gautami"/>
+        <a:font script="Taml" typeface="Latha"/>
+        <a:font script="Syrc" typeface="Estrangelo Edessa"/>
+        <a:font script="Orya" typeface="Kalinga"/>
+        <a:font script="Mlym" typeface="Kartika"/>
+        <a:font script="Laoo" typeface="DokChampa"/>
+        <a:font script="Sinh" typeface="Iskoola Pota"/>
+        <a:font script="Mong" typeface="Mongolian Baiti"/>
+        <a:font script="Viet" typeface="Times New Roman"/>
+        <a:font script="Uigh" typeface="Microsoft Uighur"/>
+        <a:font script="Geor" typeface="Sylfaen"/>
+      </a:majorFont>
+      <a:minorFont>
+        <a:latin typeface="Calibri"/>
+        <a:ea typeface=""/>
+        <a:cs typeface=""/>
+        <a:font script="Jpan" typeface="ＭＳ Ｐゴシック"/>
+        <a:font script="Hang" typeface="맑은 고딕"/>
+        <a:font script="Hans" typeface="宋体"/>
+        <a:font script="Hant" typeface="新細明體"/>
+        <a:font script="Arab" typeface="Arial"/>
+        <a:font script="Hebr" typeface="Arial"/>
+        <a:font script="Thai" typeface="Cordia New"/>
+        <a:font script="Ethi" typeface="Nyala"/>
+        <a:font script="Beng" typeface="Vrinda"/>
+        <a:font script="Gujr" typeface="Shruti"/>
+        <a:font script="Khmr" typeface="DaunPenh"/>
+        <a:font script="Knda" typeface="Tunga"/>
+        <a:font script="Guru" typeface="Raavi"/>
+        <a:font script="Cans" typeface="Euphemia"/>
+        <a:font script="Cher" typeface="Plantagenet Cherokee"/>
+        <a:font script="Yiii" typeface="Microsoft Yi Baiti"/>
+        <a:font script="Tibt" typeface="Microsoft Himalaya"/>
+        <a:font script="Thaa" typeface="MV Boli"/>
+        <a:font script="Deva" typeface="Mangal"/>
+        <a:font script="Telu" typeface="Gautami"/>
+        <a:font script="Taml" typeface="Latha"/>
+        <a:font script="Syrc" typeface="Estrangelo Edessa"/>
+        <a:font script="Orya" typeface="Kalinga"/>
+        <a:font script="Mlym" typeface="Kartika"/>
+        <a:font script="Laoo" typeface="DokChampa"/>
+        <a:font script="Sinh" typeface="Iskoola Pota"/>
+        <a:font script="Mong" typeface="Mongolian Baiti"/>
+        <a:font script="Viet" typeface="Arial"/>
+        <a:font script="Uigh" typeface="Microsoft Uighur"/>
+        <a:font script="Geor" typeface="Sylfaen"/>
+      </a:minorFont>
+    </a:fontScheme>
+    <a:fmtScheme name="Office">
+      <a:fillStyleLst>
+        <a:solidFill>
+          <a:schemeClr val="phClr"/>
+        </a:solidFill>
+        <a:gradFill rotWithShape="1">
+          <a:gsLst>
+            <a:gs pos="0">
+              <a:schemeClr val="phClr">
+                <a:tint val="50000"/>
+                <a:satMod val="300000"/>
+              </a:schemeClr>
+            </a:gs>
+            <a:gs pos="35000">
+              <a:schemeClr val="phClr">
+                <a:tint val="37000"/>
+                <a:satMod val="300000"/>
+              </a:schemeClr>
+            </a:gs>
+            <a:gs pos="100000">
+              <a:schemeClr val="phClr">
+                <a:tint val="15000"/>
+                <a:satMod val="350000"/>
+              </a:schemeClr>
+            </a:gs>
+          </a:gsLst>
+          <a:lin ang="16200000" scaled="1"/>
+        </a:gradFill>
+        <a:gradFill rotWithShape="1">
+          <a:gsLst>
+            <a:gs pos="0">
+              <a:schemeClr val="phClr">
+                <a:tint val="100000"/>
+                <a:shade val="100000"/>
+                <a:satMod val="130000"/>
+              </a:schemeClr>
+            </a:gs>
+            <a:gs pos="100000">
+              <a:schemeClr val="phClr">
+                <a:tint val="50000"/>
+                <a:shade val="100000"/>
+                <a:satMod val="350000"/>
+              </a:schemeClr>
+            </a:gs>
+          </a:gsLst>
+          <a:lin ang="16200000" scaled="0"/>
+        </a:gradFill>
+      </a:fillStyleLst>
+      <a:lnStyleLst>
+        <a:ln w="9525" cap="flat" cmpd="sng" algn="ctr">
+          <a:solidFill>
+            <a:schemeClr val="phClr">
+              <a:shade val="95000"/>
+              <a:satMod val="105000"/>
+            </a:schemeClr>
+          </a:solidFill>
+          <a:prstDash val="solid"/>
+        </a:ln>
+        <a:ln w="25400" cap="flat" cmpd="sng" algn="ctr">
+          <a:solidFill>
+            <a:schemeClr val="phClr"/>
+          </a:solidFill>
+          <a:prstDash val="solid"/>
+        </a:ln>
+        <a:ln w="38100" cap="flat" cmpd="sng" algn="ctr">
+          <a:solidFill>
+            <a:schemeClr val="phClr"/>
+          </a:solidFill>
+          <a:prstDash val="solid"/>
+        </a:ln>
+      </a:lnStyleLst>
+      <a:effectStyleLst>
+        <a:effectStyle>
+          <a:effectLst>
+            <a:outerShdw blurRad="40000" dist="20000" dir="5400000" rotWithShape="0">
+              <a:srgbClr val="000000">
+                <a:alpha val="38000"/>
+              </a:srgbClr>
+            </a:outerShdw>
+          </a:effectLst>
+        </a:effectStyle>
+        <a:effectStyle>
+          <a:effectLst>
+            <a:outerShdw blurRad="40000" dist="23000" dir="5400000" rotWithShape="0">
+              <a:srgbClr val="000000">
+                <a:alpha val="35000"/>
+              </a:srgbClr>
+            </a:outerShdw>
+          </a:effectLst>
+        </a:effectStyle>
+        <a:effectStyle>
+          <a:effectLst>
+            <a:outerShdw blurRad="40000" dist="23000" dir="5400000" rotWithShape="0">
+              <a:srgbClr val="000000">
+                <a:alpha val="35000"/>
+              </a:srgbClr>
+            </a:outerShdw>
+          </a:effectLst>
+          <a:scene3d>
+            <a:camera prst="orthographicFront">
+              <a:rot lat="0" lon="0" rev="0"/>
+            </a:camera>
+            <a:lightRig rig="threePt" dir="t">
+              <a:rot lat="0" lon="0" rev="1200000"/>
+            </a:lightRig>
+          </a:scene3d>
+          <a:sp3d>
+            <a:bevelT w="63500" h="25400"/>
+          </a:sp3d>
+        </a:effectStyle>
+      </a:effectStyleLst>
+      <a:bgFillStyleLst>
+        <a:solidFill>
+          <a:schemeClr val="phClr"/>
+        </a:solidFill>
+        <a:gradFill rotWithShape="1">
+          <a:gsLst>
+            <a:gs pos="0">
+              <a:schemeClr val="phClr">
+                <a:tint val="40000"/>
+                <a:satMod val="350000"/>
+              </a:schemeClr>
+            </a:gs>
+            <a:gs pos="40000">
+              <a:schemeClr val="phClr">
+                <a:tint val="45000"/>
+                <a:shade val="99000"/>
+                <a:satMod val="350000"/>
+              </a:schemeClr>
+            </a:gs>
+            <a:gs pos="100000">
+              <a:schemeClr val="phClr">
+                <a:shade val="20000"/>
+                <a:satMod val="255000"/>
+              </a:schemeClr>
+            </a:gs>
+          </a:gsLst>
+          <a:path path="circle">
+            <a:fillToRect l="50000" t="-80000" r="50000" b="180000"/>
+          </a:path>
+        </a:gradFill>
+        <a:gradFill rotWithShape="1">
+          <a:gsLst>
+            <a:gs pos="0">
+              <a:schemeClr val="phClr">
+                <a:tint val="80000"/>
+                <a:satMod val="300000"/>
+              </a:schemeClr>
+            </a:gs>
+            <a:gs pos="100000">
+              <a:schemeClr val="phClr">
+                <a:shade val="30000"/>
+                <a:satMod val="200000"/>
+              </a:schemeClr>
+            </a:gs>
+          </a:gsLst>
+          <a:path path="circle">
+            <a:fillToRect l="50000" t="50000" r="50000" b="50000"/>
+          </a:path>
+        </a:gradFill>
+      </a:bgFillStyleLst>
+    </a:fmtScheme>
+  </a:themeElements>
+  <a:objectDefaults>
+    <a:spDef>
+      <a:spPr/>
+      <a:bodyPr/>
+      <a:lstStyle/>
+      <a:style>
+        <a:lnRef idx="1">
+          <a:schemeClr val="accent1"/>
+        </a:lnRef>
+        <a:fillRef idx="3">
+          <a:schemeClr val="accent1"/>
+        </a:fillRef>
+        <a:effectRef idx="2">
+          <a:schemeClr val="accent1"/>
+        </a:effectRef>
+        <a:fontRef idx="minor">
+          <a:schemeClr val="lt1"/>
+        </a:fontRef>
+      </a:style>
+    </a:spDef>
+    <a:lnDef>
+      <a:spPr/>
+      <a:bodyPr/>
+      <a:lstStyle/>
+      <a:style>
+        <a:lnRef idx="2">
+          <a:schemeClr val="accent1"/>
+        </a:lnRef>
+        <a:fillRef idx="0">
+          <a:schemeClr val="accent1"/>
+        </a:fillRef>
+        <a:effectRef idx="1">
+          <a:schemeClr val="accent1"/>
+        </a:effectRef>
+        <a:fontRef idx="minor">
+          <a:schemeClr val="tx1"/>
+        </a:fontRef>
+      </a:style>
+    </a:lnDef>
+  </a:objectDefaults>
+  <a:extraClrSchemeLst/>
+</a:theme>
 </file>
--- a/S1-CL1-Cloud-Design-Build/delivery/topic_08/Topic_08a_Slides.pptx
+++ b/S1-CL1-Cloud-Design-Build/delivery/topic_08/Topic_08a_Slides.pptx
@@ -537,7 +537,7 @@
           </a:p>
           <a:p>
             <a:r>
-              <a:t>  was done in AT1; AT2 is disciplined execution + evidence.</a:t>
+              <a:t>was done in AT1; AT2 is disciplined execution + evidence.</a:t>
             </a:r>
           </a:p>
           <a:p>
@@ -547,7 +547,7 @@
           </a:p>
           <a:p>
             <a:r>
-              <a:t>  Same Topic 8, split for manageability — say so, so no one thinks they've skipped anything.</a:t>
+              <a:t>Same Topic 8, split for manageability — say so, so no one thinks they've skipped anything.</a:t>
             </a:r>
           </a:p>
           <a:p>
@@ -557,7 +557,7 @@
           </a:p>
           <a:p>
             <a:r>
-              <a:t>  it yourself, capturing named evidence as you go. That rhythm repeats all Topic.</a:t>
+              <a:t>it yourself, capturing named evidence as you go. That rhythm repeats all Topic.</a:t>
             </a:r>
           </a:p>
           <a:p>
@@ -677,7 +677,7 @@
           </a:p>
           <a:p>
             <a:r>
-              <a:t>  safe; a sick instance is taken out of rotation automatically.</a:t>
+              <a:t>safe; a sick instance is taken out of rotation automatically.</a:t>
             </a:r>
           </a:p>
           <a:p>
@@ -687,7 +687,7 @@
           </a:p>
           <a:p>
             <a:r>
-              <a:t>  VPN), matching the private, no-public-IP app server.</a:t>
+              <a:t>VPN), matching the private, no-public-IP app server.</a:t>
             </a:r>
           </a:p>
           <a:p>
@@ -802,7 +802,7 @@
           </a:p>
           <a:p>
             <a:r>
-              <a:t>  (self-healing, not just scaling — flag both jobs).</a:t>
+              <a:t>(self-healing, not just scaling — flag both jobs).</a:t>
             </a:r>
           </a:p>
           <a:p>
@@ -812,7 +812,7 @@
           </a:p>
           <a:p>
             <a:r>
-              <a:t>  target-tracking (next slide).</a:t>
+              <a:t>target-tracking (next slide).</a:t>
             </a:r>
           </a:p>
           <a:p>
@@ -822,7 +822,7 @@
           </a:p>
           <a:p>
             <a:r>
-              <a:t>  hook that becomes HA in AT3.</a:t>
+              <a:t>hook that becomes HA in AT3.</a:t>
             </a:r>
           </a:p>
           <a:p>
@@ -937,7 +937,7 @@
           </a:p>
           <a:p>
             <a:r>
-              <a:t>  trigger, cooldown = the wait before scaling again so it doesn't thrash.</a:t>
+              <a:t>trigger, cooldown = the wait before scaling again so it doesn't thrash.</a:t>
             </a:r>
           </a:p>
           <a:p>
@@ -952,7 +952,7 @@
           </a:p>
           <a:p>
             <a:r>
-              <a:t>  is AT3. Don't let a keen student build Multi-AZ now; it's out of scope for this Topic.</a:t>
+              <a:t>is AT3. Don't let a keen student build Multi-AZ now; it's out of scope for this Topic.</a:t>
             </a:r>
           </a:p>
           <a:p>
@@ -1115,7 +1115,7 @@
           </a:p>
           <a:p>
             <a:r>
-              <a:t>  healthy; that's what "behind the ALB" means concretely.</a:t>
+              <a:t>healthy; that's what "behind the ALB" means concretely.</a:t>
             </a:r>
           </a:p>
           <a:p>
@@ -1125,7 +1125,7 @@
           </a:p>
           <a:p>
             <a:r>
-              <a:t>  OBSERVE and EVIDENCE this, not just build it (PC 3.2).</a:t>
+              <a:t>OBSERVE and EVIDENCE this, not just build it (PC 3.2).</a:t>
             </a:r>
           </a:p>
           <a:p/>
@@ -1246,7 +1246,7 @@
           </a:p>
           <a:p>
             <a:r>
-              <a:t>   errors you hit.</a:t>
+              <a:t>errors you hit.</a:t>
             </a:r>
           </a:p>
           <a:p>
@@ -1376,7 +1376,7 @@
           </a:p>
           <a:p>
             <a:r>
-              <a:t>  how you "size" a server, and it's exactly the KE 5 language they're assessed on.</a:t>
+              <a:t>how you "size" a server, and it's exactly the KE 5 language they're assessed on.</a:t>
             </a:r>
           </a:p>
           <a:p>
@@ -1386,7 +1386,7 @@
           </a:p>
           <a:p>
             <a:r>
-              <a:t>  the workload, instead of buying a physical box. Callback to Topic 1's "infrastructure as software".</a:t>
+              <a:t>the workload, instead of buying a physical box. Callback to Topic 1's "infrastructure as software".</a:t>
             </a:r>
           </a:p>
           <a:p>
@@ -1496,7 +1496,7 @@
           </a:p>
           <a:p>
             <a:r>
-              <a:t>  the guest OS (Windows or Linux); you launch from an AMI into a subnet, ready in minutes.</a:t>
+              <a:t>the guest OS (Windows or Linux); you launch from an AMI into a subnet, ready in minutes.</a:t>
             </a:r>
           </a:p>
           <a:p>
@@ -1506,7 +1506,7 @@
           </a:p>
           <a:p>
             <a:r>
-              <a:t>  built the SG shells the EC2 instance now fills.</a:t>
+              <a:t>built the SG shells the EC2 instance now fills.</a:t>
             </a:r>
           </a:p>
           <a:p>
@@ -1621,7 +1621,7 @@
           </a:p>
           <a:p>
             <a:r>
-              <a:t>  m6i.large) — this is where the four sizing dimensions become a concrete pick.</a:t>
+              <a:t>m6i.large) — this is where the four sizing dimensions become a concrete pick.</a:t>
             </a:r>
           </a:p>
           <a:p>
@@ -1631,7 +1631,7 @@
           </a:p>
           <a:p>
             <a:r>
-              <a:t>  services with NO stored keys (callback to the Topic 6 role they built).</a:t>
+              <a:t>services with NO stored keys (callback to the Topic 6 role they built).</a:t>
             </a:r>
           </a:p>
           <a:p>
@@ -1751,7 +1751,7 @@
           </a:p>
           <a:p>
             <a:r>
-              <a:t>  survives. Contrast hard with instance store (ephemeral, lost on stop) — bracketed on purpose.</a:t>
+              <a:t>survives. Contrast hard with instance store (ephemeral, lost on stop) — bracketed on purpose.</a:t>
             </a:r>
           </a:p>
           <a:p>
@@ -1761,7 +1761,7 @@
           </a:p>
           <a:p>
             <a:r>
-              <a:t>  software": the disk is elastic too.</a:t>
+              <a:t>software": the disk is elastic too.</a:t>
             </a:r>
           </a:p>
           <a:p>
@@ -1881,7 +1881,7 @@
           </a:p>
           <a:p>
             <a:r>
-              <a:t>  server reached through the network, not the internet.</a:t>
+              <a:t>server reached through the network, not the internet.</a:t>
             </a:r>
           </a:p>
           <a:p>
@@ -1896,7 +1896,7 @@
           </a:p>
           <a:p>
             <a:r>
-              <a:t>  sg-app; tag per the naming standard.</a:t>
+              <a:t>sg-app; tag per the naming standard.</a:t>
             </a:r>
           </a:p>
           <a:p>
@@ -2059,7 +2059,7 @@
           </a:p>
           <a:p>
             <a:r>
-              <a:t>  that's set (subnet + auto-assign public IP off).</a:t>
+              <a:t>that's set (subnet + auto-assign public IP off).</a:t>
             </a:r>
           </a:p>
           <a:p>
@@ -2315,7 +2315,7 @@
           </a:p>
           <a:p>
             <a:r>
-              <a:t>  fixed on-prem box (callback to Topic 1's over-provisioning pain).</a:t>
+              <a:t>fixed on-prem box (callback to Topic 1's over-provisioning pain).</a:t>
             </a:r>
           </a:p>
           <a:p>
@@ -2325,7 +2325,7 @@
           </a:p>
           <a:p>
             <a:r>
-              <a:t>  instances. Make the distinction crisp — it's examinable and students blur it.</a:t>
+              <a:t>instances. Make the distinction crisp — it's examinable and students blur it.</a:t>
             </a:r>
           </a:p>
           <a:p>
@@ -5722,7 +5722,7 @@
               <a:t>■  </a:t>
             </a:r>
             <a:r>
-              <a:rPr sz="1700" b="1" i="0">
+              <a:rPr sz="1700" b="0" i="0">
                 <a:solidFill>
                   <a:srgbClr val="2A2929"/>
                 </a:solidFill>
@@ -5808,16 +5808,16 @@
             <a:r>
               <a:rPr sz="1700" b="1" i="0">
                 <a:solidFill>
-                  <a:srgbClr val="92268F"/>
+                  <a:srgbClr val="EDAB0C"/>
                 </a:solidFill>
                 <a:latin typeface="Roboto"/>
               </a:rPr>
               <a:t>■  </a:t>
             </a:r>
             <a:r>
-              <a:rPr sz="1700" b="1" i="0">
-                <a:solidFill>
-                  <a:srgbClr val="92268F"/>
+              <a:rPr sz="1700" b="0" i="0">
+                <a:solidFill>
+                  <a:srgbClr val="2A2929"/>
                 </a:solidFill>
                 <a:latin typeface="Roboto"/>
               </a:rPr>
@@ -7296,16 +7296,16 @@
             <a:r>
               <a:rPr sz="2400" b="1" i="0">
                 <a:solidFill>
-                  <a:srgbClr val="27B5CE"/>
+                  <a:srgbClr val="EDAB0C"/>
                 </a:solidFill>
                 <a:latin typeface="Roboto"/>
               </a:rPr>
               <a:t>■  </a:t>
             </a:r>
             <a:r>
-              <a:rPr sz="2400" b="1" i="0">
-                <a:solidFill>
-                  <a:srgbClr val="27B5CE"/>
+              <a:rPr sz="2400" b="0" i="0">
+                <a:solidFill>
+                  <a:srgbClr val="2A2929"/>
                 </a:solidFill>
                 <a:latin typeface="Roboto"/>
               </a:rPr>
@@ -7685,16 +7685,16 @@
             <a:r>
               <a:rPr sz="1700" b="1" i="0">
                 <a:solidFill>
-                  <a:srgbClr val="27B5CE"/>
+                  <a:srgbClr val="EDAB0C"/>
                 </a:solidFill>
                 <a:latin typeface="Roboto"/>
               </a:rPr>
               <a:t>■  </a:t>
             </a:r>
             <a:r>
-              <a:rPr sz="1700" b="1" i="0">
-                <a:solidFill>
-                  <a:srgbClr val="27B5CE"/>
+              <a:rPr sz="1700" b="0" i="0">
+                <a:solidFill>
+                  <a:srgbClr val="2A2929"/>
                 </a:solidFill>
                 <a:latin typeface="Roboto"/>
               </a:rPr>
@@ -8098,16 +8098,16 @@
             <a:r>
               <a:rPr sz="1700" b="1" i="0">
                 <a:solidFill>
-                  <a:srgbClr val="27B5CE"/>
+                  <a:srgbClr val="EDAB0C"/>
                 </a:solidFill>
                 <a:latin typeface="Roboto"/>
               </a:rPr>
               <a:t>■  </a:t>
             </a:r>
             <a:r>
-              <a:rPr sz="1700" b="1" i="0">
-                <a:solidFill>
-                  <a:srgbClr val="27B5CE"/>
+              <a:rPr sz="1700" b="0" i="0">
+                <a:solidFill>
+                  <a:srgbClr val="2A2929"/>
                 </a:solidFill>
                 <a:latin typeface="Roboto"/>
               </a:rPr>
@@ -8511,16 +8511,16 @@
             <a:r>
               <a:rPr sz="2400" b="1" i="0">
                 <a:solidFill>
-                  <a:srgbClr val="27B5CE"/>
+                  <a:srgbClr val="EDAB0C"/>
                 </a:solidFill>
                 <a:latin typeface="Roboto"/>
               </a:rPr>
               <a:t>■  </a:t>
             </a:r>
             <a:r>
-              <a:rPr sz="2400" b="1" i="0">
-                <a:solidFill>
-                  <a:srgbClr val="27B5CE"/>
+              <a:rPr sz="2400" b="0" i="0">
+                <a:solidFill>
+                  <a:srgbClr val="2A2929"/>
                 </a:solidFill>
                 <a:latin typeface="Roboto"/>
               </a:rPr>
@@ -9326,7 +9326,7 @@
               <a:t>■  </a:t>
             </a:r>
             <a:r>
-              <a:rPr sz="1700" b="1" i="0">
+              <a:rPr sz="1700" b="0" i="0">
                 <a:solidFill>
                   <a:srgbClr val="2A2929"/>
                 </a:solidFill>
@@ -9412,16 +9412,16 @@
             <a:r>
               <a:rPr sz="1700" b="1" i="0">
                 <a:solidFill>
-                  <a:srgbClr val="27B5CE"/>
+                  <a:srgbClr val="EDAB0C"/>
                 </a:solidFill>
                 <a:latin typeface="Roboto"/>
               </a:rPr>
               <a:t>■  </a:t>
             </a:r>
             <a:r>
-              <a:rPr sz="1700" b="1" i="0">
-                <a:solidFill>
-                  <a:srgbClr val="27B5CE"/>
+              <a:rPr sz="1700" b="0" i="0">
+                <a:solidFill>
+                  <a:srgbClr val="2A2929"/>
                 </a:solidFill>
                 <a:latin typeface="Roboto"/>
               </a:rPr>
@@ -10608,16 +10608,16 @@
             <a:r>
               <a:rPr sz="2400" b="1" i="0">
                 <a:solidFill>
-                  <a:srgbClr val="92268F"/>
+                  <a:srgbClr val="EDAB0C"/>
                 </a:solidFill>
                 <a:latin typeface="Roboto"/>
               </a:rPr>
               <a:t>■  </a:t>
             </a:r>
             <a:r>
-              <a:rPr sz="2400" b="1" i="0">
-                <a:solidFill>
-                  <a:srgbClr val="92268F"/>
+              <a:rPr sz="2400" b="0" i="0">
+                <a:solidFill>
+                  <a:srgbClr val="2A2929"/>
                 </a:solidFill>
                 <a:latin typeface="Roboto"/>
               </a:rPr>
@@ -10877,7 +10877,7 @@
             <a:r>
               <a:rPr sz="1800" b="1" i="0">
                 <a:solidFill>
-                  <a:srgbClr val="EDAB0C"/>
+                  <a:srgbClr val="27B5CE"/>
                 </a:solidFill>
                 <a:latin typeface="Roboto"/>
               </a:rPr>
@@ -10901,7 +10901,7 @@
             <a:avLst/>
           </a:prstGeom>
           <a:solidFill>
-            <a:srgbClr val="EDAB0C"/>
+            <a:srgbClr val="27B5CE"/>
           </a:solidFill>
           <a:ln>
             <a:noFill/>
@@ -10991,7 +10991,7 @@
             <a:avLst/>
           </a:prstGeom>
           <a:solidFill>
-            <a:srgbClr val="EDAB0C"/>
+            <a:srgbClr val="27B5CE"/>
           </a:solidFill>
           <a:ln>
             <a:noFill/>
@@ -11120,7 +11120,7 @@
             <a:avLst/>
           </a:prstGeom>
           <a:solidFill>
-            <a:srgbClr val="EDAB0C"/>
+            <a:srgbClr val="27B5CE"/>
           </a:solidFill>
           <a:ln>
             <a:noFill/>
@@ -11249,7 +11249,7 @@
             <a:avLst/>
           </a:prstGeom>
           <a:solidFill>
-            <a:srgbClr val="EDAB0C"/>
+            <a:srgbClr val="27B5CE"/>
           </a:solidFill>
           <a:ln>
             <a:noFill/>
@@ -11378,7 +11378,7 @@
             <a:avLst/>
           </a:prstGeom>
           <a:solidFill>
-            <a:srgbClr val="EDAB0C"/>
+            <a:srgbClr val="27B5CE"/>
           </a:solidFill>
           <a:ln>
             <a:noFill/>
@@ -11507,7 +11507,7 @@
             <a:avLst/>
           </a:prstGeom>
           <a:solidFill>
-            <a:srgbClr val="EDAB0C"/>
+            <a:srgbClr val="27B5CE"/>
           </a:solidFill>
           <a:ln>
             <a:noFill/>
@@ -11590,7 +11590,7 @@
             <a:avLst/>
           </a:prstGeom>
           <a:solidFill>
-            <a:srgbClr val="EDAB0C"/>
+            <a:srgbClr val="27B5CE"/>
           </a:solidFill>
           <a:ln>
             <a:noFill/>
@@ -12349,16 +12349,16 @@
             <a:r>
               <a:rPr sz="2400" b="1" i="0">
                 <a:solidFill>
-                  <a:srgbClr val="92268F"/>
+                  <a:srgbClr val="EDAB0C"/>
                 </a:solidFill>
                 <a:latin typeface="Roboto"/>
               </a:rPr>
               <a:t>■  </a:t>
             </a:r>
             <a:r>
-              <a:rPr sz="2400" b="1" i="0">
-                <a:solidFill>
-                  <a:srgbClr val="92268F"/>
+              <a:rPr sz="2400" b="0" i="0">
+                <a:solidFill>
+                  <a:srgbClr val="2A2929"/>
                 </a:solidFill>
                 <a:latin typeface="Roboto"/>
               </a:rPr>
@@ -12738,16 +12738,16 @@
             <a:r>
               <a:rPr sz="2400" b="1" i="0">
                 <a:solidFill>
-                  <a:srgbClr val="92268F"/>
+                  <a:srgbClr val="EDAB0C"/>
                 </a:solidFill>
                 <a:latin typeface="Roboto"/>
               </a:rPr>
               <a:t>■  </a:t>
             </a:r>
             <a:r>
-              <a:rPr sz="2400" b="1" i="0">
-                <a:solidFill>
-                  <a:srgbClr val="92268F"/>
+              <a:rPr sz="2400" b="0" i="0">
+                <a:solidFill>
+                  <a:srgbClr val="2A2929"/>
                 </a:solidFill>
                 <a:latin typeface="Roboto"/>
               </a:rPr>
@@ -13454,16 +13454,16 @@
             <a:r>
               <a:rPr sz="2400" b="1" i="0">
                 <a:solidFill>
-                  <a:srgbClr val="92268F"/>
+                  <a:srgbClr val="EDAB0C"/>
                 </a:solidFill>
                 <a:latin typeface="Roboto"/>
               </a:rPr>
               <a:t>■  </a:t>
             </a:r>
             <a:r>
-              <a:rPr sz="2400" b="1" i="0">
-                <a:solidFill>
-                  <a:srgbClr val="92268F"/>
+              <a:rPr sz="2400" b="0" i="0">
+                <a:solidFill>
+                  <a:srgbClr val="2A2929"/>
                 </a:solidFill>
                 <a:latin typeface="Roboto"/>
               </a:rPr>
